--- a/Qlik-Observability-Toolkit-Architecture-Qlik.pptx
+++ b/Qlik-Observability-Toolkit-Architecture-Qlik.pptx
@@ -14993,7 +14993,7 @@
                 <a:ea typeface="Inter" pitchFamily="34" charset="-122"/>
                 <a:cs typeface="Inter" pitchFamily="34" charset="-120"/>
               </a:rPr>
-              <a:t>315</a:t>
+              <a:t>9</a:t>
             </a:r>
             <a:endParaRPr lang="en-US" sz="3000" dirty="0"/>
           </a:p>
@@ -15032,7 +15032,7 @@
                 <a:ea typeface="Inter" pitchFamily="34" charset="-122"/>
                 <a:cs typeface="Inter" pitchFamily="34" charset="-120"/>
               </a:rPr>
-              <a:t>MCP tools</a:t>
+              <a:t>observability tools</a:t>
             </a:r>
             <a:endParaRPr lang="en-US" sz="1300" dirty="0"/>
           </a:p>
@@ -15071,7 +15071,7 @@
                 <a:ea typeface="Inter" pitchFamily="34" charset="-122"/>
                 <a:cs typeface="Inter" pitchFamily="34" charset="-120"/>
               </a:rPr>
-              <a:t>Auto-generated from all 20 Talend Cloud OpenAPI specs.</a:t>
+              <a:t>Read-only Talend observability surface (+ tenant-discovery meta-tool), auto-generated from OpenAPI specs.</a:t>
             </a:r>
             <a:endParaRPr lang="en-US" sz="1100" dirty="0"/>
           </a:p>
@@ -19198,7 +19198,7 @@
                 <a:ea typeface="Inter" pitchFamily="34" charset="-122"/>
                 <a:cs typeface="Inter" pitchFamily="34" charset="-120"/>
               </a:rPr>
-              <a:t>~9 tools</a:t>
+              <a:t>9 tools</a:t>
             </a:r>
             <a:endParaRPr lang="en-US" sz="1100" dirty="0"/>
           </a:p>
@@ -19237,7 +19237,7 @@
                 <a:ea typeface="Inter" pitchFamily="34" charset="-122"/>
                 <a:cs typeface="Inter" pitchFamily="34" charset="-120"/>
               </a:rPr>
-              <a:t>Pure read-only: observability-metrics, execution-logs, execution-history-search. Drops audit.</a:t>
+              <a:t>Default. Pure read-only: observability-metrics, execution-logs, execution-history-search, plus the tenant-discovery meta-tool. Drops audit.</a:t>
             </a:r>
             <a:endParaRPr lang="en-US" sz="1000" dirty="0"/>
           </a:p>
@@ -19276,7 +19276,7 @@
                 <a:ea typeface="Inter" pitchFamily="34" charset="-122"/>
                 <a:cs typeface="Inter" pitchFamily="34" charset="-120"/>
               </a:rPr>
-              <a:t>RECOMMENDED IN OBSERVABILITY MODE</a:t>
+              <a:t>DEFAULT — LOADED OUT OF THE BOX</a:t>
             </a:r>
             <a:endParaRPr lang="en-US" sz="800" dirty="0"/>
           </a:p>
@@ -19381,7 +19381,7 @@
                 <a:ea typeface="Inter" pitchFamily="34" charset="-122"/>
                 <a:cs typeface="Inter" pitchFamily="34" charset="-120"/>
               </a:rPr>
-              <a:t>~10 tools</a:t>
+              <a:t>10 tools</a:t>
             </a:r>
             <a:endParaRPr lang="en-US" sz="1100" dirty="0"/>
           </a:p>
@@ -19435,7 +19435,7 @@
         <p:spPr>
           <a:xfrm>
             <a:off x="6126480" y="1371600"/>
-            <a:ext cx="2697480" cy="2103120"/>
+            <a:ext cx="5605272" cy="2103120"/>
           </a:xfrm>
           <a:prstGeom prst="roundRect">
             <a:avLst>
@@ -19462,7 +19462,7 @@
         <p:spPr>
           <a:xfrm>
             <a:off x="6263640" y="1508760"/>
-            <a:ext cx="2377440" cy="320040"/>
+            <a:ext cx="5303520" cy="320040"/>
           </a:xfrm>
           <a:prstGeom prst="rect">
             <a:avLst/>
@@ -19486,7 +19486,7 @@
                 <a:ea typeface="Inter" pitchFamily="34" charset="-122"/>
                 <a:cs typeface="Inter" pitchFamily="34" charset="-120"/>
               </a:rPr>
-              <a:t>orchestrate</a:t>
+              <a:t>Observability-only by design</a:t>
             </a:r>
             <a:endParaRPr lang="en-US" sz="1400" dirty="0"/>
           </a:p>
@@ -19501,7 +19501,7 @@
         <p:spPr>
           <a:xfrm>
             <a:off x="6263640" y="1874520"/>
-            <a:ext cx="2377440" cy="274320"/>
+            <a:ext cx="5303520" cy="1463040"/>
           </a:xfrm>
           <a:prstGeom prst="rect">
             <a:avLst/>
@@ -19517,17 +19517,17 @@
               <a:buNone/>
             </a:pPr>
             <a:r>
-              <a:rPr lang="en-US" sz="1100" b="1" dirty="0">
-                <a:solidFill>
-                  <a:srgbClr val="009845"/>
+              <a:rPr lang="en-US" sz="1000" dirty="0">
+                <a:solidFill>
+                  <a:srgbClr val="A9B3B6"/>
                 </a:solidFill>
                 <a:latin typeface="Inter" pitchFamily="34" charset="0"/>
                 <a:ea typeface="Inter" pitchFamily="34" charset="-122"/>
                 <a:cs typeface="Inter" pitchFamily="34" charset="-120"/>
               </a:rPr>
-              <a:t>~100 tools</a:t>
-            </a:r>
-            <a:endParaRPr lang="en-US" sz="1100" dirty="0"/>
+              <a:t>No orchestration or admin endpoints are exposed. The MCP server defaults to the observability preset; only the observability and logging presets ship. Need a wider surface? Pass an explicit TMC_APIS=&lt;comma,list&gt; — but the product is scoped to read-only observability.</a:t>
+            </a:r>
+            <a:endParaRPr lang="en-US" sz="1000" dirty="0"/>
           </a:p>
         </p:txBody>
       </p:sp>
@@ -19539,8 +19539,8 @@
         </p:nvSpPr>
         <p:spPr>
           <a:xfrm>
-            <a:off x="6263640" y="2148840"/>
-            <a:ext cx="2423160" cy="1234440"/>
+            <a:off x="457200" y="3749040"/>
+            <a:ext cx="7315200" cy="274320"/>
           </a:xfrm>
           <a:prstGeom prst="rect">
             <a:avLst/>
@@ -19556,7 +19556,7 @@
               <a:buNone/>
             </a:pPr>
             <a:r>
-              <a:rPr lang="en-US" sz="1000" dirty="0">
+              <a:rPr lang="en-US" sz="1100" b="1" dirty="0">
                 <a:solidFill>
                   <a:srgbClr val="A9B3B6"/>
                 </a:solidFill>
@@ -19564,9 +19564,9 @@
                 <a:ea typeface="Inter" pitchFamily="34" charset="-122"/>
                 <a:cs typeface="Inter" pitchFamily="34" charset="-120"/>
               </a:rPr>
-              <a:t>Run things: orchestration tools + the observability trio.</a:t>
-            </a:r>
-            <a:endParaRPr lang="en-US" sz="1000" dirty="0"/>
+              <a:t>CONFIGURATION UI (npm run config-ui)</a:t>
+            </a:r>
+            <a:endParaRPr lang="en-US" sz="1100" dirty="0"/>
           </a:p>
         </p:txBody>
       </p:sp>
@@ -19578,12 +19578,12 @@
         </p:nvSpPr>
         <p:spPr>
           <a:xfrm>
-            <a:off x="8961120" y="1371600"/>
-            <a:ext cx="2697480" cy="2103120"/>
+            <a:off x="457200" y="4114800"/>
+            <a:ext cx="2697480" cy="2377440"/>
           </a:xfrm>
           <a:prstGeom prst="roundRect">
             <a:avLst>
-              <a:gd name="adj" fmla="val 2609"/>
+              <a:gd name="adj" fmla="val 2308"/>
             </a:avLst>
           </a:prstGeom>
           <a:solidFill>
@@ -19599,14 +19599,34 @@
       </p:sp>
       <p:sp>
         <p:nvSpPr>
-          <p:cNvPr id="18" name="Text 16"/>
+          <p:cNvPr id="18" name="Shape 16"/>
           <p:cNvSpPr/>
           <p:nvPr/>
         </p:nvSpPr>
         <p:spPr>
           <a:xfrm>
-            <a:off x="9098280" y="1508760"/>
-            <a:ext cx="2377440" cy="320040"/>
+            <a:off x="457200" y="4114800"/>
+            <a:ext cx="2697480" cy="365760"/>
+          </a:xfrm>
+          <a:prstGeom prst="rect">
+            <a:avLst/>
+          </a:prstGeom>
+          <a:solidFill>
+            <a:srgbClr val="93579C"/>
+          </a:solidFill>
+          <a:ln/>
+        </p:spPr>
+      </p:sp>
+      <p:sp>
+        <p:nvSpPr>
+          <p:cNvPr id="19" name="Text 17"/>
+          <p:cNvSpPr/>
+          <p:nvPr/>
+        </p:nvSpPr>
+        <p:spPr>
+          <a:xfrm>
+            <a:off x="594360" y="4169664"/>
+            <a:ext cx="2377440" cy="274320"/>
           </a:xfrm>
           <a:prstGeom prst="rect">
             <a:avLst/>
@@ -19622,30 +19642,30 @@
               <a:buNone/>
             </a:pPr>
             <a:r>
-              <a:rPr lang="en-US" sz="1400" b="1" dirty="0">
-                <a:solidFill>
-                  <a:srgbClr val="2D3543"/>
+              <a:rPr lang="en-US" sz="1200" b="1" dirty="0">
+                <a:solidFill>
+                  <a:srgbClr val="FFFFFF"/>
                 </a:solidFill>
                 <a:latin typeface="Inter" pitchFamily="34" charset="0"/>
                 <a:ea typeface="Inter" pitchFamily="34" charset="-122"/>
                 <a:cs typeface="Inter" pitchFamily="34" charset="-120"/>
               </a:rPr>
-              <a:t>all</a:t>
-            </a:r>
-            <a:endParaRPr lang="en-US" sz="1400" dirty="0"/>
-          </a:p>
-        </p:txBody>
-      </p:sp>
-      <p:sp>
-        <p:nvSpPr>
-          <p:cNvPr id="19" name="Text 17"/>
+              <a:t>Talend Cloud</a:t>
+            </a:r>
+            <a:endParaRPr lang="en-US" sz="1200" dirty="0"/>
+          </a:p>
+        </p:txBody>
+      </p:sp>
+      <p:sp>
+        <p:nvSpPr>
+          <p:cNvPr id="20" name="Text 18"/>
           <p:cNvSpPr/>
           <p:nvPr/>
         </p:nvSpPr>
         <p:spPr>
           <a:xfrm>
-            <a:off x="9098280" y="1874520"/>
-            <a:ext cx="2377440" cy="274320"/>
+            <a:off x="594360" y="4617720"/>
+            <a:ext cx="2423160" cy="1828800"/>
           </a:xfrm>
           <a:prstGeom prst="rect">
             <a:avLst/>
@@ -19661,107 +19681,29 @@
               <a:buNone/>
             </a:pPr>
             <a:r>
-              <a:rPr lang="en-US" sz="1100" b="1" dirty="0">
-                <a:solidFill>
-                  <a:srgbClr val="009845"/>
+              <a:rPr lang="en-US" sz="1000" dirty="0">
+                <a:solidFill>
+                  <a:srgbClr val="2D3543"/>
                 </a:solidFill>
                 <a:latin typeface="Inter" pitchFamily="34" charset="0"/>
                 <a:ea typeface="Inter" pitchFamily="34" charset="-122"/>
                 <a:cs typeface="Inter" pitchFamily="34" charset="-120"/>
               </a:rPr>
-              <a:t>315 tools</a:t>
-            </a:r>
-            <a:endParaRPr lang="en-US" sz="1100" dirty="0"/>
-          </a:p>
-        </p:txBody>
-      </p:sp>
-      <p:sp>
-        <p:nvSpPr>
-          <p:cNvPr id="20" name="Text 18"/>
+              <a:t>Add / edit / delete tenants. Per-tenant region + URL override. Test connection. File or OS-keyring storage.</a:t>
+            </a:r>
+            <a:endParaRPr lang="en-US" sz="1000" dirty="0"/>
+          </a:p>
+        </p:txBody>
+      </p:sp>
+      <p:sp>
+        <p:nvSpPr>
+          <p:cNvPr id="21" name="Shape 19"/>
           <p:cNvSpPr/>
           <p:nvPr/>
         </p:nvSpPr>
         <p:spPr>
           <a:xfrm>
-            <a:off x="9098280" y="2148840"/>
-            <a:ext cx="2423160" cy="1234440"/>
-          </a:xfrm>
-          <a:prstGeom prst="rect">
-            <a:avLst/>
-          </a:prstGeom>
-          <a:noFill/>
-          <a:ln/>
-        </p:spPr>
-        <p:txBody>
-          <a:bodyPr wrap="square" rtlCol="0" anchor="ctr"/>
-          <a:lstStyle/>
-          <a:p>
-            <a:pPr indent="0" marL="0">
-              <a:buNone/>
-            </a:pPr>
-            <a:r>
-              <a:rPr lang="en-US" sz="1000" dirty="0">
-                <a:solidFill>
-                  <a:srgbClr val="A9B3B6"/>
-                </a:solidFill>
-                <a:latin typeface="Inter" pitchFamily="34" charset="0"/>
-                <a:ea typeface="Inter" pitchFamily="34" charset="-122"/>
-                <a:cs typeface="Inter" pitchFamily="34" charset="-120"/>
-              </a:rPr>
-              <a:t>Every endpoint across all 20 TMC API products.</a:t>
-            </a:r>
-            <a:endParaRPr lang="en-US" sz="1000" dirty="0"/>
-          </a:p>
-        </p:txBody>
-      </p:sp>
-      <p:sp>
-        <p:nvSpPr>
-          <p:cNvPr id="21" name="Text 19"/>
-          <p:cNvSpPr/>
-          <p:nvPr/>
-        </p:nvSpPr>
-        <p:spPr>
-          <a:xfrm>
-            <a:off x="457200" y="3749040"/>
-            <a:ext cx="7315200" cy="274320"/>
-          </a:xfrm>
-          <a:prstGeom prst="rect">
-            <a:avLst/>
-          </a:prstGeom>
-          <a:noFill/>
-          <a:ln/>
-        </p:spPr>
-        <p:txBody>
-          <a:bodyPr wrap="square" rtlCol="0" anchor="ctr"/>
-          <a:lstStyle/>
-          <a:p>
-            <a:pPr indent="0" marL="0">
-              <a:buNone/>
-            </a:pPr>
-            <a:r>
-              <a:rPr lang="en-US" sz="1100" b="1" dirty="0">
-                <a:solidFill>
-                  <a:srgbClr val="A9B3B6"/>
-                </a:solidFill>
-                <a:latin typeface="Inter" pitchFamily="34" charset="0"/>
-                <a:ea typeface="Inter" pitchFamily="34" charset="-122"/>
-                <a:cs typeface="Inter" pitchFamily="34" charset="-120"/>
-              </a:rPr>
-              <a:t>CONFIGURATION UI (npm run config-ui)</a:t>
-            </a:r>
-            <a:endParaRPr lang="en-US" sz="1100" dirty="0"/>
-          </a:p>
-        </p:txBody>
-      </p:sp>
-      <p:sp>
-        <p:nvSpPr>
-          <p:cNvPr id="22" name="Shape 20"/>
-          <p:cNvSpPr/>
-          <p:nvPr/>
-        </p:nvSpPr>
-        <p:spPr>
-          <a:xfrm>
-            <a:off x="457200" y="4114800"/>
+            <a:off x="3291840" y="4114800"/>
             <a:ext cx="2697480" cy="2377440"/>
           </a:xfrm>
           <a:prstGeom prst="roundRect">
@@ -19782,33 +19724,33 @@
       </p:sp>
       <p:sp>
         <p:nvSpPr>
-          <p:cNvPr id="23" name="Shape 21"/>
+          <p:cNvPr id="22" name="Shape 20"/>
           <p:cNvSpPr/>
           <p:nvPr/>
         </p:nvSpPr>
         <p:spPr>
           <a:xfrm>
-            <a:off x="457200" y="4114800"/>
+            <a:off x="3291840" y="4114800"/>
             <a:ext cx="2697480" cy="365760"/>
           </a:xfrm>
           <a:prstGeom prst="rect">
             <a:avLst/>
           </a:prstGeom>
           <a:solidFill>
-            <a:srgbClr val="93579C"/>
+            <a:srgbClr val="009845"/>
           </a:solidFill>
           <a:ln/>
         </p:spPr>
       </p:sp>
       <p:sp>
         <p:nvSpPr>
-          <p:cNvPr id="24" name="Text 22"/>
+          <p:cNvPr id="23" name="Text 21"/>
           <p:cNvSpPr/>
           <p:nvPr/>
         </p:nvSpPr>
         <p:spPr>
           <a:xfrm>
-            <a:off x="594360" y="4169664"/>
+            <a:off x="3429000" y="4169664"/>
             <a:ext cx="2377440" cy="274320"/>
           </a:xfrm>
           <a:prstGeom prst="rect">
@@ -19833,7 +19775,7 @@
                 <a:ea typeface="Inter" pitchFamily="34" charset="-122"/>
                 <a:cs typeface="Inter" pitchFamily="34" charset="-120"/>
               </a:rPr>
-              <a:t>Talend Cloud</a:t>
+              <a:t>Qlik Cloud</a:t>
             </a:r>
             <a:endParaRPr lang="en-US" sz="1200" dirty="0"/>
           </a:p>
@@ -19841,13 +19783,13 @@
       </p:sp>
       <p:sp>
         <p:nvSpPr>
-          <p:cNvPr id="25" name="Text 23"/>
+          <p:cNvPr id="24" name="Text 22"/>
           <p:cNvSpPr/>
           <p:nvPr/>
         </p:nvSpPr>
         <p:spPr>
           <a:xfrm>
-            <a:off x="594360" y="4617720"/>
+            <a:off x="3429000" y="4617720"/>
             <a:ext cx="2423160" cy="1828800"/>
           </a:xfrm>
           <a:prstGeom prst="rect">
@@ -19872,7 +19814,7 @@
                 <a:ea typeface="Inter" pitchFamily="34" charset="-122"/>
                 <a:cs typeface="Inter" pitchFamily="34" charset="-120"/>
               </a:rPr>
-              <a:t>Add / edit / delete tenants. Per-tenant region + URL override. Test connection. File or OS-keyring storage.</a:t>
+              <a:t>Add / edit / delete tenants. Tenant URL + API key + Data Files connection ID. Test against /api/v1/users/me.</a:t>
             </a:r>
             <a:endParaRPr lang="en-US" sz="1000" dirty="0"/>
           </a:p>
@@ -19880,13 +19822,13 @@
       </p:sp>
       <p:sp>
         <p:nvSpPr>
-          <p:cNvPr id="26" name="Shape 24"/>
+          <p:cNvPr id="25" name="Shape 23"/>
           <p:cNvSpPr/>
           <p:nvPr/>
         </p:nvSpPr>
         <p:spPr>
           <a:xfrm>
-            <a:off x="3291840" y="4114800"/>
+            <a:off x="6126480" y="4114800"/>
             <a:ext cx="2697480" cy="2377440"/>
           </a:xfrm>
           <a:prstGeom prst="roundRect">
@@ -19907,33 +19849,33 @@
       </p:sp>
       <p:sp>
         <p:nvSpPr>
-          <p:cNvPr id="27" name="Shape 25"/>
+          <p:cNvPr id="26" name="Shape 24"/>
           <p:cNvSpPr/>
           <p:nvPr/>
         </p:nvSpPr>
         <p:spPr>
           <a:xfrm>
-            <a:off x="3291840" y="4114800"/>
+            <a:off x="6126480" y="4114800"/>
             <a:ext cx="2697480" cy="365760"/>
           </a:xfrm>
           <a:prstGeom prst="rect">
             <a:avLst/>
           </a:prstGeom>
           <a:solidFill>
-            <a:srgbClr val="009845"/>
+            <a:srgbClr val="19416C"/>
           </a:solidFill>
           <a:ln/>
         </p:spPr>
       </p:sp>
       <p:sp>
         <p:nvSpPr>
-          <p:cNvPr id="28" name="Text 26"/>
+          <p:cNvPr id="27" name="Text 25"/>
           <p:cNvSpPr/>
           <p:nvPr/>
         </p:nvSpPr>
         <p:spPr>
           <a:xfrm>
-            <a:off x="3429000" y="4169664"/>
+            <a:off x="6263640" y="4169664"/>
             <a:ext cx="2377440" cy="274320"/>
           </a:xfrm>
           <a:prstGeom prst="rect">
@@ -19958,7 +19900,7 @@
                 <a:ea typeface="Inter" pitchFamily="34" charset="-122"/>
                 <a:cs typeface="Inter" pitchFamily="34" charset="-120"/>
               </a:rPr>
-              <a:t>Qlik Cloud</a:t>
+              <a:t>Exporters</a:t>
             </a:r>
             <a:endParaRPr lang="en-US" sz="1200" dirty="0"/>
           </a:p>
@@ -19966,13 +19908,13 @@
       </p:sp>
       <p:sp>
         <p:nvSpPr>
-          <p:cNvPr id="29" name="Text 27"/>
+          <p:cNvPr id="28" name="Text 26"/>
           <p:cNvSpPr/>
           <p:nvPr/>
         </p:nvSpPr>
         <p:spPr>
           <a:xfrm>
-            <a:off x="3429000" y="4617720"/>
+            <a:off x="6263640" y="4617720"/>
             <a:ext cx="2423160" cy="1828800"/>
           </a:xfrm>
           <a:prstGeom prst="rect">
@@ -19997,7 +19939,7 @@
                 <a:ea typeface="Inter" pitchFamily="34" charset="-122"/>
                 <a:cs typeface="Inter" pitchFamily="34" charset="-120"/>
               </a:rPr>
-              <a:t>Add / edit / delete tenants. Tenant URL + API key + Data Files connection ID. Test against /api/v1/users/me.</a:t>
+              <a:t>Live status of every Python exporter (Docker-aware). Start / Stop with one click. Shows active series count.</a:t>
             </a:r>
             <a:endParaRPr lang="en-US" sz="1000" dirty="0"/>
           </a:p>
@@ -20005,13 +19947,13 @@
       </p:sp>
       <p:sp>
         <p:nvSpPr>
-          <p:cNvPr id="30" name="Shape 28"/>
+          <p:cNvPr id="29" name="Shape 27"/>
           <p:cNvSpPr/>
           <p:nvPr/>
         </p:nvSpPr>
         <p:spPr>
           <a:xfrm>
-            <a:off x="6126480" y="4114800"/>
+            <a:off x="8961120" y="4114800"/>
             <a:ext cx="2697480" cy="2377440"/>
           </a:xfrm>
           <a:prstGeom prst="roundRect">
@@ -20032,132 +19974,7 @@
       </p:sp>
       <p:sp>
         <p:nvSpPr>
-          <p:cNvPr id="31" name="Shape 29"/>
-          <p:cNvSpPr/>
-          <p:nvPr/>
-        </p:nvSpPr>
-        <p:spPr>
-          <a:xfrm>
-            <a:off x="6126480" y="4114800"/>
-            <a:ext cx="2697480" cy="365760"/>
-          </a:xfrm>
-          <a:prstGeom prst="rect">
-            <a:avLst/>
-          </a:prstGeom>
-          <a:solidFill>
-            <a:srgbClr val="19416C"/>
-          </a:solidFill>
-          <a:ln/>
-        </p:spPr>
-      </p:sp>
-      <p:sp>
-        <p:nvSpPr>
-          <p:cNvPr id="32" name="Text 30"/>
-          <p:cNvSpPr/>
-          <p:nvPr/>
-        </p:nvSpPr>
-        <p:spPr>
-          <a:xfrm>
-            <a:off x="6263640" y="4169664"/>
-            <a:ext cx="2377440" cy="274320"/>
-          </a:xfrm>
-          <a:prstGeom prst="rect">
-            <a:avLst/>
-          </a:prstGeom>
-          <a:noFill/>
-          <a:ln/>
-        </p:spPr>
-        <p:txBody>
-          <a:bodyPr wrap="square" rtlCol="0" anchor="ctr"/>
-          <a:lstStyle/>
-          <a:p>
-            <a:pPr indent="0" marL="0">
-              <a:buNone/>
-            </a:pPr>
-            <a:r>
-              <a:rPr lang="en-US" sz="1200" b="1" dirty="0">
-                <a:solidFill>
-                  <a:srgbClr val="FFFFFF"/>
-                </a:solidFill>
-                <a:latin typeface="Inter" pitchFamily="34" charset="0"/>
-                <a:ea typeface="Inter" pitchFamily="34" charset="-122"/>
-                <a:cs typeface="Inter" pitchFamily="34" charset="-120"/>
-              </a:rPr>
-              <a:t>Exporters</a:t>
-            </a:r>
-            <a:endParaRPr lang="en-US" sz="1200" dirty="0"/>
-          </a:p>
-        </p:txBody>
-      </p:sp>
-      <p:sp>
-        <p:nvSpPr>
-          <p:cNvPr id="33" name="Text 31"/>
-          <p:cNvSpPr/>
-          <p:nvPr/>
-        </p:nvSpPr>
-        <p:spPr>
-          <a:xfrm>
-            <a:off x="6263640" y="4617720"/>
-            <a:ext cx="2423160" cy="1828800"/>
-          </a:xfrm>
-          <a:prstGeom prst="rect">
-            <a:avLst/>
-          </a:prstGeom>
-          <a:noFill/>
-          <a:ln/>
-        </p:spPr>
-        <p:txBody>
-          <a:bodyPr wrap="square" rtlCol="0" anchor="ctr"/>
-          <a:lstStyle/>
-          <a:p>
-            <a:pPr indent="0" marL="0">
-              <a:buNone/>
-            </a:pPr>
-            <a:r>
-              <a:rPr lang="en-US" sz="1000" dirty="0">
-                <a:solidFill>
-                  <a:srgbClr val="2D3543"/>
-                </a:solidFill>
-                <a:latin typeface="Inter" pitchFamily="34" charset="0"/>
-                <a:ea typeface="Inter" pitchFamily="34" charset="-122"/>
-                <a:cs typeface="Inter" pitchFamily="34" charset="-120"/>
-              </a:rPr>
-              <a:t>Live status of every Python exporter (Docker-aware). Start / Stop with one click. Shows active series count.</a:t>
-            </a:r>
-            <a:endParaRPr lang="en-US" sz="1000" dirty="0"/>
-          </a:p>
-        </p:txBody>
-      </p:sp>
-      <p:sp>
-        <p:nvSpPr>
-          <p:cNvPr id="34" name="Shape 32"/>
-          <p:cNvSpPr/>
-          <p:nvPr/>
-        </p:nvSpPr>
-        <p:spPr>
-          <a:xfrm>
-            <a:off x="8961120" y="4114800"/>
-            <a:ext cx="2697480" cy="2377440"/>
-          </a:xfrm>
-          <a:prstGeom prst="roundRect">
-            <a:avLst>
-              <a:gd name="adj" fmla="val 2308"/>
-            </a:avLst>
-          </a:prstGeom>
-          <a:solidFill>
-            <a:srgbClr val="FFFFFF"/>
-          </a:solidFill>
-          <a:ln w="6350">
-            <a:solidFill>
-              <a:srgbClr val="A9B3B6"/>
-            </a:solidFill>
-            <a:prstDash val="solid"/>
-          </a:ln>
-        </p:spPr>
-      </p:sp>
-      <p:sp>
-        <p:nvSpPr>
-          <p:cNvPr id="35" name="Shape 33"/>
+          <p:cNvPr id="30" name="Shape 28"/>
           <p:cNvSpPr/>
           <p:nvPr/>
         </p:nvSpPr>
@@ -20177,7 +19994,7 @@
       </p:sp>
       <p:sp>
         <p:nvSpPr>
-          <p:cNvPr id="36" name="Text 34"/>
+          <p:cNvPr id="31" name="Text 29"/>
           <p:cNvSpPr/>
           <p:nvPr/>
         </p:nvSpPr>
@@ -20216,7 +20033,7 @@
       </p:sp>
       <p:sp>
         <p:nvSpPr>
-          <p:cNvPr id="37" name="Text 35"/>
+          <p:cNvPr id="32" name="Text 30"/>
           <p:cNvSpPr/>
           <p:nvPr/>
         </p:nvSpPr>

--- a/Qlik-Observability-Toolkit-Architecture-Qlik.pptx
+++ b/Qlik-Observability-Toolkit-Architecture-Qlik.pptx
@@ -14993,7 +14993,7 @@
                 <a:ea typeface="Inter" pitchFamily="34" charset="-122"/>
                 <a:cs typeface="Inter" pitchFamily="34" charset="-120"/>
               </a:rPr>
-              <a:t>9</a:t>
+              <a:t>8 + 8</a:t>
             </a:r>
             <a:endParaRPr lang="en-US" sz="3000" dirty="0"/>
           </a:p>
@@ -15071,7 +15071,7 @@
                 <a:ea typeface="Inter" pitchFamily="34" charset="-122"/>
                 <a:cs typeface="Inter" pitchFamily="34" charset="-120"/>
               </a:rPr>
-              <a:t>Read-only Talend observability surface (+ tenant-discovery meta-tool), auto-generated from OpenAPI specs.</a:t>
+              <a:t>Read-only Talend (8) + Qlik Cloud (8) observability tools, tenancy-aware, + the tenant-discovery meta-tool.</a:t>
             </a:r>
             <a:endParaRPr lang="en-US" sz="1100" dirty="0"/>
           </a:p>
@@ -16301,7 +16301,7 @@
                 <a:ea typeface="Inter" pitchFamily="34" charset="-122"/>
                 <a:cs typeface="Inter" pitchFamily="34" charset="-120"/>
               </a:rPr>
-              <a:t>stdio · per-tenant routing · observability preset</a:t>
+              <a:t>stdio · per-tenant routing · Talend + Qlik obs tools</a:t>
             </a:r>
             <a:endParaRPr lang="en-US" sz="900" dirty="0"/>
           </a:p>
@@ -19501,7 +19501,7 @@
         <p:spPr>
           <a:xfrm>
             <a:off x="6263640" y="1874520"/>
-            <a:ext cx="5303520" cy="1463040"/>
+            <a:ext cx="5303520" cy="1508760"/>
           </a:xfrm>
           <a:prstGeom prst="rect">
             <a:avLst/>
@@ -19525,7 +19525,7 @@
                 <a:ea typeface="Inter" pitchFamily="34" charset="-122"/>
                 <a:cs typeface="Inter" pitchFamily="34" charset="-120"/>
               </a:rPr>
-              <a:t>No orchestration or admin endpoints are exposed. The MCP server defaults to the observability preset; only the observability and logging presets ship. Need a wider surface? Pass an explicit TMC_APIS=&lt;comma,list&gt; — but the product is scoped to read-only observability.</a:t>
+              <a:t>No orchestration or admin endpoints are exposed. Talend presets: observability (default) + logging. Qlik Cloud adds a read-only qlik_observability__* tool family (apps, reloads, audits, quotas, spaces, users) — every tool is tenancy-aware. Need a wider Talend surface? Pass an explicit TMC_APIS=&lt;comma,list&gt;.</a:t>
             </a:r>
             <a:endParaRPr lang="en-US" sz="1000" dirty="0"/>
           </a:p>

--- a/Qlik-Observability-Toolkit-Architecture-Qlik.pptx
+++ b/Qlik-Observability-Toolkit-Architecture-Qlik.pptx
@@ -14776,8 +14776,8 @@
         </p:nvSpPr>
         <p:spPr>
           <a:xfrm>
-            <a:off x="914400" y="1280160"/>
-            <a:ext cx="10515600" cy="548640"/>
+            <a:off x="914400" y="1371600"/>
+            <a:ext cx="10515600" cy="365760"/>
           </a:xfrm>
           <a:prstGeom prst="rect">
             <a:avLst/>
@@ -14793,17 +14793,17 @@
               <a:buNone/>
             </a:pPr>
             <a:r>
-              <a:rPr lang="en-US" sz="2200" dirty="0">
-                <a:solidFill>
-                  <a:srgbClr val="006580"/>
+              <a:rPr lang="en-US" sz="1500" b="1" spc="200" kern="0" dirty="0">
+                <a:solidFill>
+                  <a:srgbClr val="009845"/>
                 </a:solidFill>
                 <a:latin typeface="Inter" pitchFamily="34" charset="0"/>
                 <a:ea typeface="Inter" pitchFamily="34" charset="-122"/>
                 <a:cs typeface="Inter" pitchFamily="34" charset="-120"/>
               </a:rPr>
-              <a:t>Talend Cloud × Qlik Cloud</a:t>
-            </a:r>
-            <a:endParaRPr lang="en-US" sz="2200" dirty="0"/>
+              <a:t>TALEND CLOUD × QLIK CLOUD</a:t>
+            </a:r>
+            <a:endParaRPr lang="en-US" sz="1500" dirty="0"/>
           </a:p>
         </p:txBody>
       </p:sp>
@@ -14873,13 +14873,13 @@
             <a:r>
               <a:rPr lang="en-US" sz="1600" dirty="0">
                 <a:solidFill>
-                  <a:srgbClr val="A9B3B6"/>
+                  <a:srgbClr val="545659"/>
                 </a:solidFill>
                 <a:latin typeface="Inter" pitchFamily="34" charset="0"/>
                 <a:ea typeface="Inter" pitchFamily="34" charset="-122"/>
                 <a:cs typeface="Inter" pitchFamily="34" charset="-120"/>
               </a:rPr>
-              <a:t>MCP server · Prometheus · Loki · Grafana · Python exporters · Qlik Sense apps</a:t>
+              <a:t>MCP server · Prometheus · Loki · Grafana · Python exporters · OpenTelemetry · Qlik Sense</a:t>
             </a:r>
             <a:endParaRPr lang="en-US" sz="1600" dirty="0"/>
           </a:p>
@@ -15065,7 +15065,7 @@
             <a:r>
               <a:rPr lang="en-US" sz="1100" dirty="0">
                 <a:solidFill>
-                  <a:srgbClr val="A9B3B6"/>
+                  <a:srgbClr val="545659"/>
                 </a:solidFill>
                 <a:latin typeface="Inter" pitchFamily="34" charset="0"/>
                 <a:ea typeface="Inter" pitchFamily="34" charset="-122"/>
@@ -15209,7 +15209,7 @@
             <a:r>
               <a:rPr lang="en-US" sz="1100" dirty="0">
                 <a:solidFill>
-                  <a:srgbClr val="A9B3B6"/>
+                  <a:srgbClr val="545659"/>
                 </a:solidFill>
                 <a:latin typeface="Inter" pitchFamily="34" charset="0"/>
                 <a:ea typeface="Inter" pitchFamily="34" charset="-122"/>
@@ -15353,7 +15353,7 @@
             <a:r>
               <a:rPr lang="en-US" sz="1100" dirty="0">
                 <a:solidFill>
-                  <a:srgbClr val="A9B3B6"/>
+                  <a:srgbClr val="545659"/>
                 </a:solidFill>
                 <a:latin typeface="Inter" pitchFamily="34" charset="0"/>
                 <a:ea typeface="Inter" pitchFamily="34" charset="-122"/>
@@ -15397,46 +15397,16 @@
           <a:chExt cx="0" cy="0"/>
         </a:xfrm>
       </p:grpSpPr>
-      <p:pic>
-        <p:nvPicPr>
-          <p:cNvPr id="2" name="Image 0" descr="deploy/assets/qlik-logo.svg">    </p:cNvPr>
-          <p:cNvPicPr>
-            <a:picLocks noChangeAspect="1"/>
-          </p:cNvPicPr>
-          <p:nvPr/>
-        </p:nvPicPr>
-        <p:blipFill>
-          <a:blip r:embed="rId1">
-            <a:extLst>
-              <a:ext uri="{96DAC541-7B7A-43D3-8B79-37D633B846F1}">
-                <asvg:svgBlip xmlns:asvg="http://schemas.microsoft.com/office/drawing/2016/SVG/main" r:embed="rId2"/>
-              </a:ext>
-            </a:extLst>
-          </a:blip>
-          <a:stretch>
-            <a:fillRect/>
-          </a:stretch>
-        </p:blipFill>
-        <p:spPr>
-          <a:xfrm>
-            <a:off x="10515600" y="292608"/>
-            <a:ext cx="1234440" cy="685800"/>
-          </a:xfrm>
-          <a:prstGeom prst="rect">
-            <a:avLst/>
-          </a:prstGeom>
-        </p:spPr>
-      </p:pic>
-      <p:sp>
-        <p:nvSpPr>
-          <p:cNvPr id="3" name="Text 0"/>
+      <p:sp>
+        <p:nvSpPr>
+          <p:cNvPr id="2" name="Text 0"/>
           <p:cNvSpPr/>
           <p:nvPr/>
         </p:nvSpPr>
         <p:spPr>
           <a:xfrm>
-            <a:off x="457200" y="274320"/>
-            <a:ext cx="9692640" cy="502920"/>
+            <a:off x="1874520" y="310896"/>
+            <a:ext cx="9509760" cy="502920"/>
           </a:xfrm>
           <a:prstGeom prst="rect">
             <a:avLst/>
@@ -15452,9 +15422,9 @@
               <a:buNone/>
             </a:pPr>
             <a:r>
-              <a:rPr lang="en-US" sz="2500" b="1" dirty="0">
-                <a:solidFill>
-                  <a:srgbClr val="006580"/>
+              <a:rPr lang="en-US" sz="2400" b="1" spc="-30" kern="0" dirty="0">
+                <a:solidFill>
+                  <a:srgbClr val="2D3543"/>
                 </a:solidFill>
                 <a:latin typeface="Inter" pitchFamily="34" charset="0"/>
                 <a:ea typeface="Inter" pitchFamily="34" charset="-122"/>
@@ -15462,20 +15432,20 @@
               </a:rPr>
               <a:t>Qlik Observability Toolkit — architecture</a:t>
             </a:r>
-            <a:endParaRPr lang="en-US" sz="2500" dirty="0"/>
-          </a:p>
-        </p:txBody>
-      </p:sp>
-      <p:sp>
-        <p:nvSpPr>
-          <p:cNvPr id="4" name="Text 1"/>
+            <a:endParaRPr lang="en-US" sz="2400" dirty="0"/>
+          </a:p>
+        </p:txBody>
+      </p:sp>
+      <p:sp>
+        <p:nvSpPr>
+          <p:cNvPr id="3" name="Text 1"/>
           <p:cNvSpPr/>
           <p:nvPr/>
         </p:nvSpPr>
         <p:spPr>
           <a:xfrm>
-            <a:off x="457200" y="777240"/>
-            <a:ext cx="9692640" cy="320040"/>
+            <a:off x="1874520" y="804672"/>
+            <a:ext cx="9509760" cy="320040"/>
           </a:xfrm>
           <a:prstGeom prst="rect">
             <a:avLst/>
@@ -15493,13 +15463,13 @@
             <a:r>
               <a:rPr lang="en-US" sz="1250" dirty="0">
                 <a:solidFill>
-                  <a:srgbClr val="A9B3B6"/>
+                  <a:srgbClr val="545659"/>
                 </a:solidFill>
                 <a:latin typeface="Inter" pitchFamily="34" charset="0"/>
                 <a:ea typeface="Inter" pitchFamily="34" charset="-122"/>
                 <a:cs typeface="Inter" pitchFamily="34" charset="-120"/>
               </a:rPr>
-              <a:t>Three planes: data sources → collection &amp; control → storage, visualization &amp; analytics.</a:t>
+              <a:t>Data sources → collection &amp; control → store, visualize &amp; analyze — with telemetry export.</a:t>
             </a:r>
             <a:endParaRPr lang="en-US" sz="1250" dirty="0"/>
           </a:p>
@@ -15507,14 +15477,14 @@
       </p:sp>
       <p:sp>
         <p:nvSpPr>
-          <p:cNvPr id="5" name="Shape 2"/>
+          <p:cNvPr id="4" name="Shape 2"/>
           <p:cNvSpPr/>
           <p:nvPr/>
         </p:nvSpPr>
         <p:spPr>
           <a:xfrm>
-            <a:off x="457200" y="1325880"/>
-            <a:ext cx="3383280" cy="4572000"/>
+            <a:off x="457200" y="1280160"/>
+            <a:ext cx="3383280" cy="3931920"/>
           </a:xfrm>
           <a:prstGeom prst="roundRect">
             <a:avLst>
@@ -15534,13 +15504,13 @@
       </p:sp>
       <p:sp>
         <p:nvSpPr>
-          <p:cNvPr id="6" name="Text 3"/>
+          <p:cNvPr id="5" name="Text 3"/>
           <p:cNvSpPr/>
           <p:nvPr/>
         </p:nvSpPr>
         <p:spPr>
           <a:xfrm>
-            <a:off x="594360" y="1435608"/>
+            <a:off x="594360" y="1389888"/>
             <a:ext cx="3108960" cy="274320"/>
           </a:xfrm>
           <a:prstGeom prst="rect">
@@ -15559,7 +15529,7 @@
             <a:r>
               <a:rPr lang="en-US" sz="1100" b="1" spc="100" kern="0" dirty="0">
                 <a:solidFill>
-                  <a:srgbClr val="006580"/>
+                  <a:srgbClr val="009845"/>
                 </a:solidFill>
                 <a:latin typeface="Inter" pitchFamily="34" charset="0"/>
                 <a:ea typeface="Inter" pitchFamily="34" charset="-122"/>
@@ -15573,18 +15543,18 @@
       </p:sp>
       <p:sp>
         <p:nvSpPr>
-          <p:cNvPr id="7" name="Shape 4"/>
+          <p:cNvPr id="6" name="Shape 4"/>
           <p:cNvSpPr/>
           <p:nvPr/>
         </p:nvSpPr>
         <p:spPr>
           <a:xfrm>
-            <a:off x="4114800" y="1325880"/>
-            <a:ext cx="4160520" cy="4572000"/>
+            <a:off x="4114800" y="1280160"/>
+            <a:ext cx="4160520" cy="3931920"/>
           </a:xfrm>
           <a:prstGeom prst="roundRect">
             <a:avLst>
-              <a:gd name="adj" fmla="val 1758"/>
+              <a:gd name="adj" fmla="val 1860"/>
             </a:avLst>
           </a:prstGeom>
           <a:solidFill>
@@ -15600,13 +15570,13 @@
       </p:sp>
       <p:sp>
         <p:nvSpPr>
-          <p:cNvPr id="8" name="Text 5"/>
+          <p:cNvPr id="7" name="Text 5"/>
           <p:cNvSpPr/>
           <p:nvPr/>
         </p:nvSpPr>
         <p:spPr>
           <a:xfrm>
-            <a:off x="4251960" y="1435608"/>
+            <a:off x="4251960" y="1389888"/>
             <a:ext cx="3886200" cy="274320"/>
           </a:xfrm>
           <a:prstGeom prst="rect">
@@ -15625,7 +15595,7 @@
             <a:r>
               <a:rPr lang="en-US" sz="1100" b="1" spc="100" kern="0" dirty="0">
                 <a:solidFill>
-                  <a:srgbClr val="006580"/>
+                  <a:srgbClr val="009845"/>
                 </a:solidFill>
                 <a:latin typeface="Inter" pitchFamily="34" charset="0"/>
                 <a:ea typeface="Inter" pitchFamily="34" charset="-122"/>
@@ -15639,14 +15609,14 @@
       </p:sp>
       <p:sp>
         <p:nvSpPr>
-          <p:cNvPr id="9" name="Shape 6"/>
+          <p:cNvPr id="8" name="Shape 6"/>
           <p:cNvSpPr/>
           <p:nvPr/>
         </p:nvSpPr>
         <p:spPr>
           <a:xfrm>
-            <a:off x="8549640" y="1325880"/>
-            <a:ext cx="3154680" cy="4572000"/>
+            <a:off x="8549640" y="1280160"/>
+            <a:ext cx="3154680" cy="3931920"/>
           </a:xfrm>
           <a:prstGeom prst="roundRect">
             <a:avLst>
@@ -15666,13 +15636,13 @@
       </p:sp>
       <p:sp>
         <p:nvSpPr>
-          <p:cNvPr id="10" name="Text 7"/>
+          <p:cNvPr id="9" name="Text 7"/>
           <p:cNvSpPr/>
           <p:nvPr/>
         </p:nvSpPr>
         <p:spPr>
           <a:xfrm>
-            <a:off x="8686800" y="1435608"/>
+            <a:off x="8686800" y="1389888"/>
             <a:ext cx="2880360" cy="274320"/>
           </a:xfrm>
           <a:prstGeom prst="rect">
@@ -15691,7 +15661,7 @@
             <a:r>
               <a:rPr lang="en-US" sz="1100" b="1" spc="100" kern="0" dirty="0">
                 <a:solidFill>
-                  <a:srgbClr val="006580"/>
+                  <a:srgbClr val="009845"/>
                 </a:solidFill>
                 <a:latin typeface="Inter" pitchFamily="34" charset="0"/>
                 <a:ea typeface="Inter" pitchFamily="34" charset="-122"/>
@@ -15705,13 +15675,13 @@
       </p:sp>
       <p:sp>
         <p:nvSpPr>
-          <p:cNvPr id="11" name="Shape 8"/>
+          <p:cNvPr id="10" name="Shape 8"/>
           <p:cNvSpPr/>
           <p:nvPr/>
         </p:nvSpPr>
         <p:spPr>
           <a:xfrm>
-            <a:off x="594360" y="1783080"/>
+            <a:off x="594360" y="1691640"/>
             <a:ext cx="3108960" cy="868680"/>
           </a:xfrm>
           <a:prstGeom prst="roundRect">
@@ -15732,13 +15702,13 @@
       </p:sp>
       <p:sp>
         <p:nvSpPr>
-          <p:cNvPr id="12" name="Shape 9"/>
+          <p:cNvPr id="11" name="Shape 9"/>
           <p:cNvSpPr/>
           <p:nvPr/>
         </p:nvSpPr>
         <p:spPr>
           <a:xfrm>
-            <a:off x="594360" y="1783080"/>
+            <a:off x="594360" y="1691640"/>
             <a:ext cx="91440" cy="868680"/>
           </a:xfrm>
           <a:prstGeom prst="roundRect">
@@ -15754,7 +15724,309 @@
       </p:sp>
       <p:pic>
         <p:nvPicPr>
-          <p:cNvPr id="13" name="Image 1" descr="deploy/assets/icons/talend-cloud.png">    </p:cNvPr>
+          <p:cNvPr id="12" name="Image 0" descr="deploy/assets/icons/talend-cloud.png">    </p:cNvPr>
+          <p:cNvPicPr>
+            <a:picLocks noChangeAspect="1"/>
+          </p:cNvPicPr>
+          <p:nvPr/>
+        </p:nvPicPr>
+        <p:blipFill>
+          <a:blip r:embed="rId1"/>
+          <a:stretch>
+            <a:fillRect/>
+          </a:stretch>
+        </p:blipFill>
+        <p:spPr>
+          <a:xfrm>
+            <a:off x="813816" y="1860804"/>
+            <a:ext cx="530352" cy="530352"/>
+          </a:xfrm>
+          <a:prstGeom prst="rect">
+            <a:avLst/>
+          </a:prstGeom>
+        </p:spPr>
+      </p:pic>
+      <p:sp>
+        <p:nvSpPr>
+          <p:cNvPr id="13" name="Text 10"/>
+          <p:cNvSpPr/>
+          <p:nvPr/>
+        </p:nvSpPr>
+        <p:spPr>
+          <a:xfrm>
+            <a:off x="1508760" y="1801368"/>
+            <a:ext cx="2103120" cy="292608"/>
+          </a:xfrm>
+          <a:prstGeom prst="rect">
+            <a:avLst/>
+          </a:prstGeom>
+          <a:noFill/>
+          <a:ln/>
+        </p:spPr>
+        <p:txBody>
+          <a:bodyPr wrap="square" rtlCol="0" anchor="ctr"/>
+          <a:lstStyle/>
+          <a:p>
+            <a:pPr indent="0" marL="0">
+              <a:buNone/>
+            </a:pPr>
+            <a:r>
+              <a:rPr lang="en-US" sz="1200" b="1" dirty="0">
+                <a:solidFill>
+                  <a:srgbClr val="2D3543"/>
+                </a:solidFill>
+                <a:latin typeface="Inter" pitchFamily="34" charset="0"/>
+                <a:ea typeface="Inter" pitchFamily="34" charset="-122"/>
+                <a:cs typeface="Inter" pitchFamily="34" charset="-120"/>
+              </a:rPr>
+              <a:t>Talend Cloud — N tenants</a:t>
+            </a:r>
+            <a:endParaRPr lang="en-US" sz="1200" dirty="0"/>
+          </a:p>
+        </p:txBody>
+      </p:sp>
+      <p:sp>
+        <p:nvSpPr>
+          <p:cNvPr id="14" name="Text 11"/>
+          <p:cNvSpPr/>
+          <p:nvPr/>
+        </p:nvSpPr>
+        <p:spPr>
+          <a:xfrm>
+            <a:off x="1508760" y="2093976"/>
+            <a:ext cx="2103120" cy="393192"/>
+          </a:xfrm>
+          <a:prstGeom prst="rect">
+            <a:avLst/>
+          </a:prstGeom>
+          <a:noFill/>
+          <a:ln/>
+        </p:spPr>
+        <p:txBody>
+          <a:bodyPr wrap="square" rtlCol="0" anchor="t"/>
+          <a:lstStyle/>
+          <a:p>
+            <a:pPr indent="0" marL="0">
+              <a:buNone/>
+            </a:pPr>
+            <a:r>
+              <a:rPr lang="en-US" sz="900" dirty="0">
+                <a:solidFill>
+                  <a:srgbClr val="545659"/>
+                </a:solidFill>
+                <a:latin typeface="Inter" pitchFamily="34" charset="0"/>
+                <a:ea typeface="Inter" pitchFamily="34" charset="-122"/>
+                <a:cs typeface="Inter" pitchFamily="34" charset="-120"/>
+              </a:rPr>
+              <a:t>Orchestration · Observability · Exec-history · Audit</a:t>
+            </a:r>
+            <a:endParaRPr lang="en-US" sz="900" dirty="0"/>
+          </a:p>
+        </p:txBody>
+      </p:sp>
+      <p:sp>
+        <p:nvSpPr>
+          <p:cNvPr id="15" name="Shape 12"/>
+          <p:cNvSpPr/>
+          <p:nvPr/>
+        </p:nvSpPr>
+        <p:spPr>
+          <a:xfrm>
+            <a:off x="594360" y="2834640"/>
+            <a:ext cx="3108960" cy="868680"/>
+          </a:xfrm>
+          <a:prstGeom prst="roundRect">
+            <a:avLst>
+              <a:gd name="adj" fmla="val 7368"/>
+            </a:avLst>
+          </a:prstGeom>
+          <a:solidFill>
+            <a:srgbClr val="FFFFFF"/>
+          </a:solidFill>
+          <a:ln w="15875">
+            <a:solidFill>
+              <a:srgbClr val="009845"/>
+            </a:solidFill>
+            <a:prstDash val="solid"/>
+          </a:ln>
+        </p:spPr>
+      </p:sp>
+      <p:sp>
+        <p:nvSpPr>
+          <p:cNvPr id="16" name="Shape 13"/>
+          <p:cNvSpPr/>
+          <p:nvPr/>
+        </p:nvSpPr>
+        <p:spPr>
+          <a:xfrm>
+            <a:off x="594360" y="2834640"/>
+            <a:ext cx="91440" cy="868680"/>
+          </a:xfrm>
+          <a:prstGeom prst="roundRect">
+            <a:avLst>
+              <a:gd name="adj" fmla="val 70000"/>
+            </a:avLst>
+          </a:prstGeom>
+          <a:solidFill>
+            <a:srgbClr val="009845"/>
+          </a:solidFill>
+          <a:ln/>
+        </p:spPr>
+      </p:sp>
+      <p:pic>
+        <p:nvPicPr>
+          <p:cNvPr id="17" name="Image 1" descr="deploy/assets/icons/qlik-cloud.png">    </p:cNvPr>
+          <p:cNvPicPr>
+            <a:picLocks noChangeAspect="1"/>
+          </p:cNvPicPr>
+          <p:nvPr/>
+        </p:nvPicPr>
+        <p:blipFill>
+          <a:blip r:embed="rId2"/>
+          <a:stretch>
+            <a:fillRect/>
+          </a:stretch>
+        </p:blipFill>
+        <p:spPr>
+          <a:xfrm>
+            <a:off x="813816" y="3003804"/>
+            <a:ext cx="530352" cy="530352"/>
+          </a:xfrm>
+          <a:prstGeom prst="rect">
+            <a:avLst/>
+          </a:prstGeom>
+        </p:spPr>
+      </p:pic>
+      <p:sp>
+        <p:nvSpPr>
+          <p:cNvPr id="18" name="Text 14"/>
+          <p:cNvSpPr/>
+          <p:nvPr/>
+        </p:nvSpPr>
+        <p:spPr>
+          <a:xfrm>
+            <a:off x="1508760" y="2944368"/>
+            <a:ext cx="2103120" cy="292608"/>
+          </a:xfrm>
+          <a:prstGeom prst="rect">
+            <a:avLst/>
+          </a:prstGeom>
+          <a:noFill/>
+          <a:ln/>
+        </p:spPr>
+        <p:txBody>
+          <a:bodyPr wrap="square" rtlCol="0" anchor="ctr"/>
+          <a:lstStyle/>
+          <a:p>
+            <a:pPr indent="0" marL="0">
+              <a:buNone/>
+            </a:pPr>
+            <a:r>
+              <a:rPr lang="en-US" sz="1200" b="1" dirty="0">
+                <a:solidFill>
+                  <a:srgbClr val="2D3543"/>
+                </a:solidFill>
+                <a:latin typeface="Inter" pitchFamily="34" charset="0"/>
+                <a:ea typeface="Inter" pitchFamily="34" charset="-122"/>
+                <a:cs typeface="Inter" pitchFamily="34" charset="-120"/>
+              </a:rPr>
+              <a:t>Qlik Cloud — N tenants</a:t>
+            </a:r>
+            <a:endParaRPr lang="en-US" sz="1200" dirty="0"/>
+          </a:p>
+        </p:txBody>
+      </p:sp>
+      <p:sp>
+        <p:nvSpPr>
+          <p:cNvPr id="19" name="Text 15"/>
+          <p:cNvSpPr/>
+          <p:nvPr/>
+        </p:nvSpPr>
+        <p:spPr>
+          <a:xfrm>
+            <a:off x="1508760" y="3236976"/>
+            <a:ext cx="2103120" cy="393192"/>
+          </a:xfrm>
+          <a:prstGeom prst="rect">
+            <a:avLst/>
+          </a:prstGeom>
+          <a:noFill/>
+          <a:ln/>
+        </p:spPr>
+        <p:txBody>
+          <a:bodyPr wrap="square" rtlCol="0" anchor="t"/>
+          <a:lstStyle/>
+          <a:p>
+            <a:pPr indent="0" marL="0">
+              <a:buNone/>
+            </a:pPr>
+            <a:r>
+              <a:rPr lang="en-US" sz="900" dirty="0">
+                <a:solidFill>
+                  <a:srgbClr val="545659"/>
+                </a:solidFill>
+                <a:latin typeface="Inter" pitchFamily="34" charset="0"/>
+                <a:ea typeface="Inter" pitchFamily="34" charset="-122"/>
+                <a:cs typeface="Inter" pitchFamily="34" charset="-120"/>
+              </a:rPr>
+              <a:t>Apps · Reloads · Audit · Quotas</a:t>
+            </a:r>
+            <a:endParaRPr lang="en-US" sz="900" dirty="0"/>
+          </a:p>
+        </p:txBody>
+      </p:sp>
+      <p:sp>
+        <p:nvSpPr>
+          <p:cNvPr id="20" name="Shape 16"/>
+          <p:cNvSpPr/>
+          <p:nvPr/>
+        </p:nvSpPr>
+        <p:spPr>
+          <a:xfrm>
+            <a:off x="594360" y="3977640"/>
+            <a:ext cx="3108960" cy="868680"/>
+          </a:xfrm>
+          <a:prstGeom prst="roundRect">
+            <a:avLst>
+              <a:gd name="adj" fmla="val 7368"/>
+            </a:avLst>
+          </a:prstGeom>
+          <a:solidFill>
+            <a:srgbClr val="FFFFFF"/>
+          </a:solidFill>
+          <a:ln w="15875">
+            <a:solidFill>
+              <a:srgbClr val="006580"/>
+            </a:solidFill>
+            <a:prstDash val="solid"/>
+          </a:ln>
+        </p:spPr>
+      </p:sp>
+      <p:sp>
+        <p:nvSpPr>
+          <p:cNvPr id="21" name="Shape 17"/>
+          <p:cNvSpPr/>
+          <p:nvPr/>
+        </p:nvSpPr>
+        <p:spPr>
+          <a:xfrm>
+            <a:off x="594360" y="3977640"/>
+            <a:ext cx="91440" cy="868680"/>
+          </a:xfrm>
+          <a:prstGeom prst="roundRect">
+            <a:avLst>
+              <a:gd name="adj" fmla="val 70000"/>
+            </a:avLst>
+          </a:prstGeom>
+          <a:solidFill>
+            <a:srgbClr val="006580"/>
+          </a:solidFill>
+          <a:ln/>
+        </p:spPr>
+      </p:sp>
+      <p:pic>
+        <p:nvPicPr>
+          <p:cNvPr id="22" name="Image 2" descr="deploy/assets/icons/remote-engine.png">    </p:cNvPr>
           <p:cNvPicPr>
             <a:picLocks noChangeAspect="1"/>
           </p:cNvPicPr>
@@ -15768,8 +16040,8 @@
         </p:blipFill>
         <p:spPr>
           <a:xfrm>
-            <a:off x="813816" y="1933956"/>
-            <a:ext cx="566928" cy="566928"/>
+            <a:off x="813816" y="4146804"/>
+            <a:ext cx="530352" cy="530352"/>
           </a:xfrm>
           <a:prstGeom prst="rect">
             <a:avLst/>
@@ -15778,14 +16050,14 @@
       </p:pic>
       <p:sp>
         <p:nvSpPr>
-          <p:cNvPr id="14" name="Text 10"/>
+          <p:cNvPr id="23" name="Text 18"/>
           <p:cNvSpPr/>
           <p:nvPr/>
         </p:nvSpPr>
         <p:spPr>
           <a:xfrm>
-            <a:off x="1508760" y="1892808"/>
-            <a:ext cx="2103120" cy="310896"/>
+            <a:off x="1508760" y="4087368"/>
+            <a:ext cx="2103120" cy="292608"/>
           </a:xfrm>
           <a:prstGeom prst="rect">
             <a:avLst/>
@@ -15809,7 +16081,7 @@
                 <a:ea typeface="Inter" pitchFamily="34" charset="-122"/>
                 <a:cs typeface="Inter" pitchFamily="34" charset="-120"/>
               </a:rPr>
-              <a:t>Talend Cloud — N tenants</a:t>
+              <a:t>Remote Engine hosts</a:t>
             </a:r>
             <a:endParaRPr lang="en-US" sz="1200" dirty="0"/>
           </a:p>
@@ -15817,13 +16089,13 @@
       </p:sp>
       <p:sp>
         <p:nvSpPr>
-          <p:cNvPr id="15" name="Text 11"/>
+          <p:cNvPr id="24" name="Text 19"/>
           <p:cNvSpPr/>
           <p:nvPr/>
         </p:nvSpPr>
         <p:spPr>
           <a:xfrm>
-            <a:off x="1508760" y="2185416"/>
+            <a:off x="1508760" y="4379976"/>
             <a:ext cx="2103120" cy="393192"/>
           </a:xfrm>
           <a:prstGeom prst="rect">
@@ -15842,13 +16114,13 @@
             <a:r>
               <a:rPr lang="en-US" sz="900" dirty="0">
                 <a:solidFill>
-                  <a:srgbClr val="A9B3B6"/>
+                  <a:srgbClr val="545659"/>
                 </a:solidFill>
                 <a:latin typeface="Inter" pitchFamily="34" charset="0"/>
                 <a:ea typeface="Inter" pitchFamily="34" charset="-122"/>
                 <a:cs typeface="Inter" pitchFamily="34" charset="-120"/>
               </a:rPr>
-              <a:t>Orchestration · Observability · Exec-history · Audit</a:t>
+              <a:t>JSON job-management logs on Linux</a:t>
             </a:r>
             <a:endParaRPr lang="en-US" sz="900" dirty="0"/>
           </a:p>
@@ -15856,14 +16128,14 @@
       </p:sp>
       <p:sp>
         <p:nvSpPr>
-          <p:cNvPr id="16" name="Shape 12"/>
+          <p:cNvPr id="25" name="Shape 20"/>
           <p:cNvSpPr/>
           <p:nvPr/>
         </p:nvSpPr>
         <p:spPr>
           <a:xfrm>
-            <a:off x="594360" y="2926080"/>
-            <a:ext cx="3108960" cy="868680"/>
+            <a:off x="4251960" y="1691640"/>
+            <a:ext cx="3886200" cy="868680"/>
           </a:xfrm>
           <a:prstGeom prst="roundRect">
             <a:avLst>
@@ -15875,7 +16147,7 @@
           </a:solidFill>
           <a:ln w="15875">
             <a:solidFill>
-              <a:srgbClr val="009845"/>
+              <a:srgbClr val="19416C"/>
             </a:solidFill>
             <a:prstDash val="solid"/>
           </a:ln>
@@ -15883,13 +16155,13 @@
       </p:sp>
       <p:sp>
         <p:nvSpPr>
-          <p:cNvPr id="17" name="Shape 13"/>
+          <p:cNvPr id="26" name="Shape 21"/>
           <p:cNvSpPr/>
           <p:nvPr/>
         </p:nvSpPr>
         <p:spPr>
           <a:xfrm>
-            <a:off x="594360" y="2926080"/>
+            <a:off x="4251960" y="1691640"/>
             <a:ext cx="91440" cy="868680"/>
           </a:xfrm>
           <a:prstGeom prst="roundRect">
@@ -15898,14 +16170,14 @@
             </a:avLst>
           </a:prstGeom>
           <a:solidFill>
-            <a:srgbClr val="009845"/>
+            <a:srgbClr val="19416C"/>
           </a:solidFill>
           <a:ln/>
         </p:spPr>
       </p:sp>
       <p:pic>
         <p:nvPicPr>
-          <p:cNvPr id="18" name="Image 2" descr="deploy/assets/icons/qlik-cloud.png">    </p:cNvPr>
+          <p:cNvPr id="27" name="Image 3" descr="deploy/assets/icons/mcp.png">    </p:cNvPr>
           <p:cNvPicPr>
             <a:picLocks noChangeAspect="1"/>
           </p:cNvPicPr>
@@ -15919,8 +16191,8 @@
         </p:blipFill>
         <p:spPr>
           <a:xfrm>
-            <a:off x="813816" y="3076956"/>
-            <a:ext cx="566928" cy="566928"/>
+            <a:off x="4471416" y="1860804"/>
+            <a:ext cx="530352" cy="530352"/>
           </a:xfrm>
           <a:prstGeom prst="rect">
             <a:avLst/>
@@ -15929,14 +16201,14 @@
       </p:pic>
       <p:sp>
         <p:nvSpPr>
-          <p:cNvPr id="19" name="Text 14"/>
+          <p:cNvPr id="28" name="Text 22"/>
           <p:cNvSpPr/>
           <p:nvPr/>
         </p:nvSpPr>
         <p:spPr>
           <a:xfrm>
-            <a:off x="1508760" y="3035808"/>
-            <a:ext cx="2103120" cy="310896"/>
+            <a:off x="5166360" y="1801368"/>
+            <a:ext cx="2880360" cy="292608"/>
           </a:xfrm>
           <a:prstGeom prst="rect">
             <a:avLst/>
@@ -15960,7 +16232,7 @@
                 <a:ea typeface="Inter" pitchFamily="34" charset="-122"/>
                 <a:cs typeface="Inter" pitchFamily="34" charset="-120"/>
               </a:rPr>
-              <a:t>Qlik Cloud — N tenants</a:t>
+              <a:t>MCP server (TS)</a:t>
             </a:r>
             <a:endParaRPr lang="en-US" sz="1200" dirty="0"/>
           </a:p>
@@ -15968,14 +16240,14 @@
       </p:sp>
       <p:sp>
         <p:nvSpPr>
-          <p:cNvPr id="20" name="Text 15"/>
+          <p:cNvPr id="29" name="Text 23"/>
           <p:cNvSpPr/>
           <p:nvPr/>
         </p:nvSpPr>
         <p:spPr>
           <a:xfrm>
-            <a:off x="1508760" y="3328416"/>
-            <a:ext cx="2103120" cy="393192"/>
+            <a:off x="5166360" y="2093976"/>
+            <a:ext cx="2880360" cy="393192"/>
           </a:xfrm>
           <a:prstGeom prst="rect">
             <a:avLst/>
@@ -15993,13 +16265,13 @@
             <a:r>
               <a:rPr lang="en-US" sz="900" dirty="0">
                 <a:solidFill>
-                  <a:srgbClr val="A9B3B6"/>
+                  <a:srgbClr val="545659"/>
                 </a:solidFill>
                 <a:latin typeface="Inter" pitchFamily="34" charset="0"/>
                 <a:ea typeface="Inter" pitchFamily="34" charset="-122"/>
                 <a:cs typeface="Inter" pitchFamily="34" charset="-120"/>
               </a:rPr>
-              <a:t>Apps · Reloads · Audit · Quotas</a:t>
+              <a:t>stdio · per-tenant routing · Talend + Qlik obs tools</a:t>
             </a:r>
             <a:endParaRPr lang="en-US" sz="900" dirty="0"/>
           </a:p>
@@ -16007,14 +16279,14 @@
       </p:sp>
       <p:sp>
         <p:nvSpPr>
-          <p:cNvPr id="21" name="Shape 16"/>
+          <p:cNvPr id="30" name="Shape 24"/>
           <p:cNvSpPr/>
           <p:nvPr/>
         </p:nvSpPr>
         <p:spPr>
           <a:xfrm>
-            <a:off x="594360" y="4069080"/>
-            <a:ext cx="3108960" cy="868680"/>
+            <a:off x="4251960" y="2834640"/>
+            <a:ext cx="3886200" cy="868680"/>
           </a:xfrm>
           <a:prstGeom prst="roundRect">
             <a:avLst>
@@ -16026,7 +16298,7 @@
           </a:solidFill>
           <a:ln w="15875">
             <a:solidFill>
-              <a:srgbClr val="006580"/>
+              <a:srgbClr val="19416C"/>
             </a:solidFill>
             <a:prstDash val="solid"/>
           </a:ln>
@@ -16034,13 +16306,13 @@
       </p:sp>
       <p:sp>
         <p:nvSpPr>
-          <p:cNvPr id="22" name="Shape 17"/>
+          <p:cNvPr id="31" name="Shape 25"/>
           <p:cNvSpPr/>
           <p:nvPr/>
         </p:nvSpPr>
         <p:spPr>
           <a:xfrm>
-            <a:off x="594360" y="4069080"/>
+            <a:off x="4251960" y="2834640"/>
             <a:ext cx="91440" cy="868680"/>
           </a:xfrm>
           <a:prstGeom prst="roundRect">
@@ -16049,14 +16321,14 @@
             </a:avLst>
           </a:prstGeom>
           <a:solidFill>
-            <a:srgbClr val="006580"/>
+            <a:srgbClr val="19416C"/>
           </a:solidFill>
           <a:ln/>
         </p:spPr>
       </p:sp>
       <p:pic>
         <p:nvPicPr>
-          <p:cNvPr id="23" name="Image 3" descr="deploy/assets/icons/remote-engine.png">    </p:cNvPr>
+          <p:cNvPr id="32" name="Image 4" descr="deploy/assets/icons/exporters.png">    </p:cNvPr>
           <p:cNvPicPr>
             <a:picLocks noChangeAspect="1"/>
           </p:cNvPicPr>
@@ -16070,8 +16342,8 @@
         </p:blipFill>
         <p:spPr>
           <a:xfrm>
-            <a:off x="813816" y="4219956"/>
-            <a:ext cx="566928" cy="566928"/>
+            <a:off x="4471416" y="3003804"/>
+            <a:ext cx="530352" cy="530352"/>
           </a:xfrm>
           <a:prstGeom prst="rect">
             <a:avLst/>
@@ -16080,14 +16352,14 @@
       </p:pic>
       <p:sp>
         <p:nvSpPr>
-          <p:cNvPr id="24" name="Text 18"/>
+          <p:cNvPr id="33" name="Text 26"/>
           <p:cNvSpPr/>
           <p:nvPr/>
         </p:nvSpPr>
         <p:spPr>
           <a:xfrm>
-            <a:off x="1508760" y="4178808"/>
-            <a:ext cx="2103120" cy="310896"/>
+            <a:off x="5166360" y="2944368"/>
+            <a:ext cx="2880360" cy="292608"/>
           </a:xfrm>
           <a:prstGeom prst="rect">
             <a:avLst/>
@@ -16111,7 +16383,7 @@
                 <a:ea typeface="Inter" pitchFamily="34" charset="-122"/>
                 <a:cs typeface="Inter" pitchFamily="34" charset="-120"/>
               </a:rPr>
-              <a:t>Remote Engine hosts</a:t>
+              <a:t>Python exporters ×4</a:t>
             </a:r>
             <a:endParaRPr lang="en-US" sz="1200" dirty="0"/>
           </a:p>
@@ -16119,14 +16391,14 @@
       </p:sp>
       <p:sp>
         <p:nvSpPr>
-          <p:cNvPr id="25" name="Text 19"/>
+          <p:cNvPr id="34" name="Text 27"/>
           <p:cNvSpPr/>
           <p:nvPr/>
         </p:nvSpPr>
         <p:spPr>
           <a:xfrm>
-            <a:off x="1508760" y="4471416"/>
-            <a:ext cx="2103120" cy="393192"/>
+            <a:off x="5166360" y="3236976"/>
+            <a:ext cx="2880360" cy="393192"/>
           </a:xfrm>
           <a:prstGeom prst="rect">
             <a:avLst/>
@@ -16144,13 +16416,13 @@
             <a:r>
               <a:rPr lang="en-US" sz="900" dirty="0">
                 <a:solidFill>
-                  <a:srgbClr val="A9B3B6"/>
+                  <a:srgbClr val="545659"/>
                 </a:solidFill>
                 <a:latin typeface="Inter" pitchFamily="34" charset="0"/>
                 <a:ea typeface="Inter" pitchFamily="34" charset="-122"/>
                 <a:cs typeface="Inter" pitchFamily="34" charset="-120"/>
               </a:rPr>
-              <a:t>JSON job-management logs on Linux</a:t>
+              <a:t>business · engine-logs · qlik-obs · qvd</a:t>
             </a:r>
             <a:endParaRPr lang="en-US" sz="900" dirty="0"/>
           </a:p>
@@ -16158,13 +16430,13 @@
       </p:sp>
       <p:sp>
         <p:nvSpPr>
-          <p:cNvPr id="26" name="Shape 20"/>
+          <p:cNvPr id="35" name="Shape 28"/>
           <p:cNvSpPr/>
           <p:nvPr/>
         </p:nvSpPr>
         <p:spPr>
           <a:xfrm>
-            <a:off x="4251960" y="1783080"/>
+            <a:off x="4251960" y="3977640"/>
             <a:ext cx="3886200" cy="868680"/>
           </a:xfrm>
           <a:prstGeom prst="roundRect">
@@ -16177,7 +16449,7 @@
           </a:solidFill>
           <a:ln w="15875">
             <a:solidFill>
-              <a:srgbClr val="19416C"/>
+              <a:srgbClr val="009845"/>
             </a:solidFill>
             <a:prstDash val="solid"/>
           </a:ln>
@@ -16185,13 +16457,13 @@
       </p:sp>
       <p:sp>
         <p:nvSpPr>
-          <p:cNvPr id="27" name="Shape 21"/>
+          <p:cNvPr id="36" name="Shape 29"/>
           <p:cNvSpPr/>
           <p:nvPr/>
         </p:nvSpPr>
         <p:spPr>
           <a:xfrm>
-            <a:off x="4251960" y="1783080"/>
+            <a:off x="4251960" y="3977640"/>
             <a:ext cx="91440" cy="868680"/>
           </a:xfrm>
           <a:prstGeom prst="roundRect">
@@ -16200,14 +16472,14 @@
             </a:avLst>
           </a:prstGeom>
           <a:solidFill>
-            <a:srgbClr val="19416C"/>
+            <a:srgbClr val="009845"/>
           </a:solidFill>
           <a:ln/>
         </p:spPr>
       </p:sp>
       <p:pic>
         <p:nvPicPr>
-          <p:cNvPr id="28" name="Image 4" descr="deploy/assets/icons/mcp.png">    </p:cNvPr>
+          <p:cNvPr id="37" name="Image 5" descr="deploy/assets/icons/extractor.png">    </p:cNvPr>
           <p:cNvPicPr>
             <a:picLocks noChangeAspect="1"/>
           </p:cNvPicPr>
@@ -16221,8 +16493,8 @@
         </p:blipFill>
         <p:spPr>
           <a:xfrm>
-            <a:off x="4471416" y="1933956"/>
-            <a:ext cx="566928" cy="566928"/>
+            <a:off x="4471416" y="4146804"/>
+            <a:ext cx="530352" cy="530352"/>
           </a:xfrm>
           <a:prstGeom prst="rect">
             <a:avLst/>
@@ -16231,14 +16503,14 @@
       </p:pic>
       <p:sp>
         <p:nvSpPr>
-          <p:cNvPr id="29" name="Text 22"/>
+          <p:cNvPr id="38" name="Text 30"/>
           <p:cNvSpPr/>
           <p:nvPr/>
         </p:nvSpPr>
         <p:spPr>
           <a:xfrm>
-            <a:off x="5166360" y="1892808"/>
-            <a:ext cx="2880360" cy="310896"/>
+            <a:off x="5166360" y="4087368"/>
+            <a:ext cx="2880360" cy="292608"/>
           </a:xfrm>
           <a:prstGeom prst="rect">
             <a:avLst/>
@@ -16262,7 +16534,7 @@
                 <a:ea typeface="Inter" pitchFamily="34" charset="-122"/>
                 <a:cs typeface="Inter" pitchFamily="34" charset="-120"/>
               </a:rPr>
-              <a:t>MCP server (TS)</a:t>
+              <a:t>qlik-engine-extractor</a:t>
             </a:r>
             <a:endParaRPr lang="en-US" sz="1200" dirty="0"/>
           </a:p>
@@ -16270,13 +16542,13 @@
       </p:sp>
       <p:sp>
         <p:nvSpPr>
-          <p:cNvPr id="30" name="Text 23"/>
+          <p:cNvPr id="39" name="Text 31"/>
           <p:cNvSpPr/>
           <p:nvPr/>
         </p:nvSpPr>
         <p:spPr>
           <a:xfrm>
-            <a:off x="5166360" y="2185416"/>
+            <a:off x="5166360" y="4379976"/>
             <a:ext cx="2880360" cy="393192"/>
           </a:xfrm>
           <a:prstGeom prst="rect">
@@ -16295,13 +16567,13 @@
             <a:r>
               <a:rPr lang="en-US" sz="900" dirty="0">
                 <a:solidFill>
-                  <a:srgbClr val="A9B3B6"/>
+                  <a:srgbClr val="545659"/>
                 </a:solidFill>
                 <a:latin typeface="Inter" pitchFamily="34" charset="0"/>
                 <a:ea typeface="Inter" pitchFamily="34" charset="-122"/>
                 <a:cs typeface="Inter" pitchFamily="34" charset="-120"/>
               </a:rPr>
-              <a:t>stdio · per-tenant routing · Talend + Qlik obs tools</a:t>
+              <a:t>headless agent · self-diagnosing · heartbeats</a:t>
             </a:r>
             <a:endParaRPr lang="en-US" sz="900" dirty="0"/>
           </a:p>
@@ -16309,14 +16581,14 @@
       </p:sp>
       <p:sp>
         <p:nvSpPr>
-          <p:cNvPr id="31" name="Shape 24"/>
+          <p:cNvPr id="40" name="Shape 32"/>
           <p:cNvSpPr/>
           <p:nvPr/>
         </p:nvSpPr>
         <p:spPr>
           <a:xfrm>
-            <a:off x="4251960" y="2926080"/>
-            <a:ext cx="3886200" cy="868680"/>
+            <a:off x="8686800" y="1691640"/>
+            <a:ext cx="2880360" cy="868680"/>
           </a:xfrm>
           <a:prstGeom prst="roundRect">
             <a:avLst>
@@ -16328,7 +16600,7 @@
           </a:solidFill>
           <a:ln w="15875">
             <a:solidFill>
-              <a:srgbClr val="19416C"/>
+              <a:srgbClr val="2D3543"/>
             </a:solidFill>
             <a:prstDash val="solid"/>
           </a:ln>
@@ -16336,13 +16608,13 @@
       </p:sp>
       <p:sp>
         <p:nvSpPr>
-          <p:cNvPr id="32" name="Shape 25"/>
+          <p:cNvPr id="41" name="Shape 33"/>
           <p:cNvSpPr/>
           <p:nvPr/>
         </p:nvSpPr>
         <p:spPr>
           <a:xfrm>
-            <a:off x="4251960" y="2926080"/>
+            <a:off x="8686800" y="1691640"/>
             <a:ext cx="91440" cy="868680"/>
           </a:xfrm>
           <a:prstGeom prst="roundRect">
@@ -16351,14 +16623,14 @@
             </a:avLst>
           </a:prstGeom>
           <a:solidFill>
-            <a:srgbClr val="19416C"/>
+            <a:srgbClr val="2D3543"/>
           </a:solidFill>
           <a:ln/>
         </p:spPr>
       </p:sp>
       <p:pic>
         <p:nvPicPr>
-          <p:cNvPr id="33" name="Image 5" descr="deploy/assets/icons/exporters.png">    </p:cNvPr>
+          <p:cNvPr id="42" name="Image 6" descr="deploy/assets/icons/prometheus.png">    </p:cNvPr>
           <p:cNvPicPr>
             <a:picLocks noChangeAspect="1"/>
           </p:cNvPicPr>
@@ -16372,8 +16644,8 @@
         </p:blipFill>
         <p:spPr>
           <a:xfrm>
-            <a:off x="4471416" y="3076956"/>
-            <a:ext cx="566928" cy="566928"/>
+            <a:off x="8906256" y="1860804"/>
+            <a:ext cx="530352" cy="530352"/>
           </a:xfrm>
           <a:prstGeom prst="rect">
             <a:avLst/>
@@ -16382,14 +16654,14 @@
       </p:pic>
       <p:sp>
         <p:nvSpPr>
-          <p:cNvPr id="34" name="Text 26"/>
+          <p:cNvPr id="43" name="Text 34"/>
           <p:cNvSpPr/>
           <p:nvPr/>
         </p:nvSpPr>
         <p:spPr>
           <a:xfrm>
-            <a:off x="5166360" y="3035808"/>
-            <a:ext cx="2880360" cy="310896"/>
+            <a:off x="9601200" y="1801368"/>
+            <a:ext cx="1874520" cy="292608"/>
           </a:xfrm>
           <a:prstGeom prst="rect">
             <a:avLst/>
@@ -16413,7 +16685,7 @@
                 <a:ea typeface="Inter" pitchFamily="34" charset="-122"/>
                 <a:cs typeface="Inter" pitchFamily="34" charset="-120"/>
               </a:rPr>
-              <a:t>Python exporters ×4</a:t>
+              <a:t>Prometheus</a:t>
             </a:r>
             <a:endParaRPr lang="en-US" sz="1200" dirty="0"/>
           </a:p>
@@ -16421,14 +16693,14 @@
       </p:sp>
       <p:sp>
         <p:nvSpPr>
-          <p:cNvPr id="35" name="Text 27"/>
+          <p:cNvPr id="44" name="Text 35"/>
           <p:cNvSpPr/>
           <p:nvPr/>
         </p:nvSpPr>
         <p:spPr>
           <a:xfrm>
-            <a:off x="5166360" y="3328416"/>
-            <a:ext cx="2880360" cy="393192"/>
+            <a:off x="9601200" y="2093976"/>
+            <a:ext cx="1874520" cy="393192"/>
           </a:xfrm>
           <a:prstGeom prst="rect">
             <a:avLst/>
@@ -16446,13 +16718,13 @@
             <a:r>
               <a:rPr lang="en-US" sz="900" dirty="0">
                 <a:solidFill>
-                  <a:srgbClr val="A9B3B6"/>
+                  <a:srgbClr val="545659"/>
                 </a:solidFill>
                 <a:latin typeface="Inter" pitchFamily="34" charset="0"/>
                 <a:ea typeface="Inter" pitchFamily="34" charset="-122"/>
                 <a:cs typeface="Inter" pitchFamily="34" charset="-120"/>
               </a:rPr>
-              <a:t>business · engine-logs · qlik-obs · qvd</a:t>
+              <a:t>scrape all /metrics · 14d</a:t>
             </a:r>
             <a:endParaRPr lang="en-US" sz="900" dirty="0"/>
           </a:p>
@@ -16460,14 +16732,14 @@
       </p:sp>
       <p:sp>
         <p:nvSpPr>
-          <p:cNvPr id="36" name="Shape 28"/>
+          <p:cNvPr id="45" name="Shape 36"/>
           <p:cNvSpPr/>
           <p:nvPr/>
         </p:nvSpPr>
         <p:spPr>
           <a:xfrm>
-            <a:off x="4251960" y="4069080"/>
-            <a:ext cx="3886200" cy="868680"/>
+            <a:off x="8686800" y="2834640"/>
+            <a:ext cx="2880360" cy="868680"/>
           </a:xfrm>
           <a:prstGeom prst="roundRect">
             <a:avLst>
@@ -16479,7 +16751,7 @@
           </a:solidFill>
           <a:ln w="15875">
             <a:solidFill>
-              <a:srgbClr val="009845"/>
+              <a:srgbClr val="10CFC9"/>
             </a:solidFill>
             <a:prstDash val="solid"/>
           </a:ln>
@@ -16487,13 +16759,13 @@
       </p:sp>
       <p:sp>
         <p:nvSpPr>
-          <p:cNvPr id="37" name="Shape 29"/>
+          <p:cNvPr id="46" name="Shape 37"/>
           <p:cNvSpPr/>
           <p:nvPr/>
         </p:nvSpPr>
         <p:spPr>
           <a:xfrm>
-            <a:off x="4251960" y="4069080"/>
+            <a:off x="8686800" y="2834640"/>
             <a:ext cx="91440" cy="868680"/>
           </a:xfrm>
           <a:prstGeom prst="roundRect">
@@ -16502,14 +16774,14 @@
             </a:avLst>
           </a:prstGeom>
           <a:solidFill>
-            <a:srgbClr val="009845"/>
+            <a:srgbClr val="10CFC9"/>
           </a:solidFill>
           <a:ln/>
         </p:spPr>
       </p:sp>
       <p:pic>
         <p:nvPicPr>
-          <p:cNvPr id="38" name="Image 6" descr="deploy/assets/icons/extractor.png">    </p:cNvPr>
+          <p:cNvPr id="47" name="Image 7" descr="deploy/assets/icons/grafana.png">    </p:cNvPr>
           <p:cNvPicPr>
             <a:picLocks noChangeAspect="1"/>
           </p:cNvPicPr>
@@ -16523,8 +16795,8 @@
         </p:blipFill>
         <p:spPr>
           <a:xfrm>
-            <a:off x="4471416" y="4219956"/>
-            <a:ext cx="566928" cy="566928"/>
+            <a:off x="8906256" y="3003804"/>
+            <a:ext cx="530352" cy="530352"/>
           </a:xfrm>
           <a:prstGeom prst="rect">
             <a:avLst/>
@@ -16533,14 +16805,14 @@
       </p:pic>
       <p:sp>
         <p:nvSpPr>
-          <p:cNvPr id="39" name="Text 30"/>
+          <p:cNvPr id="48" name="Text 38"/>
           <p:cNvSpPr/>
           <p:nvPr/>
         </p:nvSpPr>
         <p:spPr>
           <a:xfrm>
-            <a:off x="5166360" y="4178808"/>
-            <a:ext cx="2880360" cy="310896"/>
+            <a:off x="9601200" y="2944368"/>
+            <a:ext cx="1874520" cy="292608"/>
           </a:xfrm>
           <a:prstGeom prst="rect">
             <a:avLst/>
@@ -16564,7 +16836,7 @@
                 <a:ea typeface="Inter" pitchFamily="34" charset="-122"/>
                 <a:cs typeface="Inter" pitchFamily="34" charset="-120"/>
               </a:rPr>
-              <a:t>qlik-engine-extractor</a:t>
+              <a:t>Loki + Grafana</a:t>
             </a:r>
             <a:endParaRPr lang="en-US" sz="1200" dirty="0"/>
           </a:p>
@@ -16572,14 +16844,14 @@
       </p:sp>
       <p:sp>
         <p:nvSpPr>
-          <p:cNvPr id="40" name="Text 31"/>
+          <p:cNvPr id="49" name="Text 39"/>
           <p:cNvSpPr/>
           <p:nvPr/>
         </p:nvSpPr>
         <p:spPr>
           <a:xfrm>
-            <a:off x="5166360" y="4471416"/>
-            <a:ext cx="2880360" cy="393192"/>
+            <a:off x="9601200" y="3236976"/>
+            <a:ext cx="1874520" cy="393192"/>
           </a:xfrm>
           <a:prstGeom prst="rect">
             <a:avLst/>
@@ -16597,13 +16869,13 @@
             <a:r>
               <a:rPr lang="en-US" sz="900" dirty="0">
                 <a:solidFill>
-                  <a:srgbClr val="A9B3B6"/>
+                  <a:srgbClr val="545659"/>
                 </a:solidFill>
                 <a:latin typeface="Inter" pitchFamily="34" charset="0"/>
                 <a:ea typeface="Inter" pitchFamily="34" charset="-122"/>
                 <a:cs typeface="Inter" pitchFamily="34" charset="-120"/>
               </a:rPr>
-              <a:t>headless agent · self-diagnosing · heartbeats</a:t>
+              <a:t>logs + 2 dashboards</a:t>
             </a:r>
             <a:endParaRPr lang="en-US" sz="900" dirty="0"/>
           </a:p>
@@ -16611,13 +16883,13 @@
       </p:sp>
       <p:sp>
         <p:nvSpPr>
-          <p:cNvPr id="41" name="Shape 32"/>
+          <p:cNvPr id="50" name="Shape 40"/>
           <p:cNvSpPr/>
           <p:nvPr/>
         </p:nvSpPr>
         <p:spPr>
           <a:xfrm>
-            <a:off x="8686800" y="1783080"/>
+            <a:off x="8686800" y="3977640"/>
             <a:ext cx="2880360" cy="868680"/>
           </a:xfrm>
           <a:prstGeom prst="roundRect">
@@ -16630,7 +16902,7 @@
           </a:solidFill>
           <a:ln w="15875">
             <a:solidFill>
-              <a:srgbClr val="2D3543"/>
+              <a:srgbClr val="009845"/>
             </a:solidFill>
             <a:prstDash val="solid"/>
           </a:ln>
@@ -16638,13 +16910,13 @@
       </p:sp>
       <p:sp>
         <p:nvSpPr>
-          <p:cNvPr id="42" name="Shape 33"/>
+          <p:cNvPr id="51" name="Shape 41"/>
           <p:cNvSpPr/>
           <p:nvPr/>
         </p:nvSpPr>
         <p:spPr>
           <a:xfrm>
-            <a:off x="8686800" y="1783080"/>
+            <a:off x="8686800" y="3977640"/>
             <a:ext cx="91440" cy="868680"/>
           </a:xfrm>
           <a:prstGeom prst="roundRect">
@@ -16653,14 +16925,14 @@
             </a:avLst>
           </a:prstGeom>
           <a:solidFill>
-            <a:srgbClr val="2D3543"/>
+            <a:srgbClr val="009845"/>
           </a:solidFill>
           <a:ln/>
         </p:spPr>
       </p:sp>
       <p:pic>
         <p:nvPicPr>
-          <p:cNvPr id="43" name="Image 7" descr="deploy/assets/icons/prometheus.png">    </p:cNvPr>
+          <p:cNvPr id="52" name="Image 8" descr="deploy/assets/icons/qlik-app.png">    </p:cNvPr>
           <p:cNvPicPr>
             <a:picLocks noChangeAspect="1"/>
           </p:cNvPicPr>
@@ -16674,8 +16946,8 @@
         </p:blipFill>
         <p:spPr>
           <a:xfrm>
-            <a:off x="8906256" y="1933956"/>
-            <a:ext cx="566928" cy="566928"/>
+            <a:off x="8906256" y="4146804"/>
+            <a:ext cx="530352" cy="530352"/>
           </a:xfrm>
           <a:prstGeom prst="rect">
             <a:avLst/>
@@ -16684,316 +16956,14 @@
       </p:pic>
       <p:sp>
         <p:nvSpPr>
-          <p:cNvPr id="44" name="Text 34"/>
+          <p:cNvPr id="53" name="Text 42"/>
           <p:cNvSpPr/>
           <p:nvPr/>
         </p:nvSpPr>
         <p:spPr>
           <a:xfrm>
-            <a:off x="9601200" y="1892808"/>
-            <a:ext cx="1874520" cy="310896"/>
-          </a:xfrm>
-          <a:prstGeom prst="rect">
-            <a:avLst/>
-          </a:prstGeom>
-          <a:noFill/>
-          <a:ln/>
-        </p:spPr>
-        <p:txBody>
-          <a:bodyPr wrap="square" rtlCol="0" anchor="ctr"/>
-          <a:lstStyle/>
-          <a:p>
-            <a:pPr indent="0" marL="0">
-              <a:buNone/>
-            </a:pPr>
-            <a:r>
-              <a:rPr lang="en-US" sz="1200" b="1" dirty="0">
-                <a:solidFill>
-                  <a:srgbClr val="2D3543"/>
-                </a:solidFill>
-                <a:latin typeface="Inter" pitchFamily="34" charset="0"/>
-                <a:ea typeface="Inter" pitchFamily="34" charset="-122"/>
-                <a:cs typeface="Inter" pitchFamily="34" charset="-120"/>
-              </a:rPr>
-              <a:t>Prometheus</a:t>
-            </a:r>
-            <a:endParaRPr lang="en-US" sz="1200" dirty="0"/>
-          </a:p>
-        </p:txBody>
-      </p:sp>
-      <p:sp>
-        <p:nvSpPr>
-          <p:cNvPr id="45" name="Text 35"/>
-          <p:cNvSpPr/>
-          <p:nvPr/>
-        </p:nvSpPr>
-        <p:spPr>
-          <a:xfrm>
-            <a:off x="9601200" y="2185416"/>
-            <a:ext cx="1874520" cy="393192"/>
-          </a:xfrm>
-          <a:prstGeom prst="rect">
-            <a:avLst/>
-          </a:prstGeom>
-          <a:noFill/>
-          <a:ln/>
-        </p:spPr>
-        <p:txBody>
-          <a:bodyPr wrap="square" rtlCol="0" anchor="t"/>
-          <a:lstStyle/>
-          <a:p>
-            <a:pPr indent="0" marL="0">
-              <a:buNone/>
-            </a:pPr>
-            <a:r>
-              <a:rPr lang="en-US" sz="900" dirty="0">
-                <a:solidFill>
-                  <a:srgbClr val="A9B3B6"/>
-                </a:solidFill>
-                <a:latin typeface="Inter" pitchFamily="34" charset="0"/>
-                <a:ea typeface="Inter" pitchFamily="34" charset="-122"/>
-                <a:cs typeface="Inter" pitchFamily="34" charset="-120"/>
-              </a:rPr>
-              <a:t>scrape all /metrics · 14d</a:t>
-            </a:r>
-            <a:endParaRPr lang="en-US" sz="900" dirty="0"/>
-          </a:p>
-        </p:txBody>
-      </p:sp>
-      <p:sp>
-        <p:nvSpPr>
-          <p:cNvPr id="46" name="Shape 36"/>
-          <p:cNvSpPr/>
-          <p:nvPr/>
-        </p:nvSpPr>
-        <p:spPr>
-          <a:xfrm>
-            <a:off x="8686800" y="2926080"/>
-            <a:ext cx="2880360" cy="868680"/>
-          </a:xfrm>
-          <a:prstGeom prst="roundRect">
-            <a:avLst>
-              <a:gd name="adj" fmla="val 7368"/>
-            </a:avLst>
-          </a:prstGeom>
-          <a:solidFill>
-            <a:srgbClr val="FFFFFF"/>
-          </a:solidFill>
-          <a:ln w="15875">
-            <a:solidFill>
-              <a:srgbClr val="10CFC9"/>
-            </a:solidFill>
-            <a:prstDash val="solid"/>
-          </a:ln>
-        </p:spPr>
-      </p:sp>
-      <p:sp>
-        <p:nvSpPr>
-          <p:cNvPr id="47" name="Shape 37"/>
-          <p:cNvSpPr/>
-          <p:nvPr/>
-        </p:nvSpPr>
-        <p:spPr>
-          <a:xfrm>
-            <a:off x="8686800" y="2926080"/>
-            <a:ext cx="91440" cy="868680"/>
-          </a:xfrm>
-          <a:prstGeom prst="roundRect">
-            <a:avLst>
-              <a:gd name="adj" fmla="val 70000"/>
-            </a:avLst>
-          </a:prstGeom>
-          <a:solidFill>
-            <a:srgbClr val="10CFC9"/>
-          </a:solidFill>
-          <a:ln/>
-        </p:spPr>
-      </p:sp>
-      <p:pic>
-        <p:nvPicPr>
-          <p:cNvPr id="48" name="Image 8" descr="deploy/assets/icons/grafana.png">    </p:cNvPr>
-          <p:cNvPicPr>
-            <a:picLocks noChangeAspect="1"/>
-          </p:cNvPicPr>
-          <p:nvPr/>
-        </p:nvPicPr>
-        <p:blipFill>
-          <a:blip r:embed="rId10"/>
-          <a:stretch>
-            <a:fillRect/>
-          </a:stretch>
-        </p:blipFill>
-        <p:spPr>
-          <a:xfrm>
-            <a:off x="8906256" y="3076956"/>
-            <a:ext cx="566928" cy="566928"/>
-          </a:xfrm>
-          <a:prstGeom prst="rect">
-            <a:avLst/>
-          </a:prstGeom>
-        </p:spPr>
-      </p:pic>
-      <p:sp>
-        <p:nvSpPr>
-          <p:cNvPr id="49" name="Text 38"/>
-          <p:cNvSpPr/>
-          <p:nvPr/>
-        </p:nvSpPr>
-        <p:spPr>
-          <a:xfrm>
-            <a:off x="9601200" y="3035808"/>
-            <a:ext cx="1874520" cy="310896"/>
-          </a:xfrm>
-          <a:prstGeom prst="rect">
-            <a:avLst/>
-          </a:prstGeom>
-          <a:noFill/>
-          <a:ln/>
-        </p:spPr>
-        <p:txBody>
-          <a:bodyPr wrap="square" rtlCol="0" anchor="ctr"/>
-          <a:lstStyle/>
-          <a:p>
-            <a:pPr indent="0" marL="0">
-              <a:buNone/>
-            </a:pPr>
-            <a:r>
-              <a:rPr lang="en-US" sz="1200" b="1" dirty="0">
-                <a:solidFill>
-                  <a:srgbClr val="2D3543"/>
-                </a:solidFill>
-                <a:latin typeface="Inter" pitchFamily="34" charset="0"/>
-                <a:ea typeface="Inter" pitchFamily="34" charset="-122"/>
-                <a:cs typeface="Inter" pitchFamily="34" charset="-120"/>
-              </a:rPr>
-              <a:t>Loki + Grafana</a:t>
-            </a:r>
-            <a:endParaRPr lang="en-US" sz="1200" dirty="0"/>
-          </a:p>
-        </p:txBody>
-      </p:sp>
-      <p:sp>
-        <p:nvSpPr>
-          <p:cNvPr id="50" name="Text 39"/>
-          <p:cNvSpPr/>
-          <p:nvPr/>
-        </p:nvSpPr>
-        <p:spPr>
-          <a:xfrm>
-            <a:off x="9601200" y="3328416"/>
-            <a:ext cx="1874520" cy="393192"/>
-          </a:xfrm>
-          <a:prstGeom prst="rect">
-            <a:avLst/>
-          </a:prstGeom>
-          <a:noFill/>
-          <a:ln/>
-        </p:spPr>
-        <p:txBody>
-          <a:bodyPr wrap="square" rtlCol="0" anchor="t"/>
-          <a:lstStyle/>
-          <a:p>
-            <a:pPr indent="0" marL="0">
-              <a:buNone/>
-            </a:pPr>
-            <a:r>
-              <a:rPr lang="en-US" sz="900" dirty="0">
-                <a:solidFill>
-                  <a:srgbClr val="A9B3B6"/>
-                </a:solidFill>
-                <a:latin typeface="Inter" pitchFamily="34" charset="0"/>
-                <a:ea typeface="Inter" pitchFamily="34" charset="-122"/>
-                <a:cs typeface="Inter" pitchFamily="34" charset="-120"/>
-              </a:rPr>
-              <a:t>logs + 2 dashboards</a:t>
-            </a:r>
-            <a:endParaRPr lang="en-US" sz="900" dirty="0"/>
-          </a:p>
-        </p:txBody>
-      </p:sp>
-      <p:sp>
-        <p:nvSpPr>
-          <p:cNvPr id="51" name="Shape 40"/>
-          <p:cNvSpPr/>
-          <p:nvPr/>
-        </p:nvSpPr>
-        <p:spPr>
-          <a:xfrm>
-            <a:off x="8686800" y="4069080"/>
-            <a:ext cx="2880360" cy="868680"/>
-          </a:xfrm>
-          <a:prstGeom prst="roundRect">
-            <a:avLst>
-              <a:gd name="adj" fmla="val 7368"/>
-            </a:avLst>
-          </a:prstGeom>
-          <a:solidFill>
-            <a:srgbClr val="FFFFFF"/>
-          </a:solidFill>
-          <a:ln w="15875">
-            <a:solidFill>
-              <a:srgbClr val="009845"/>
-            </a:solidFill>
-            <a:prstDash val="solid"/>
-          </a:ln>
-        </p:spPr>
-      </p:sp>
-      <p:sp>
-        <p:nvSpPr>
-          <p:cNvPr id="52" name="Shape 41"/>
-          <p:cNvSpPr/>
-          <p:nvPr/>
-        </p:nvSpPr>
-        <p:spPr>
-          <a:xfrm>
-            <a:off x="8686800" y="4069080"/>
-            <a:ext cx="91440" cy="868680"/>
-          </a:xfrm>
-          <a:prstGeom prst="roundRect">
-            <a:avLst>
-              <a:gd name="adj" fmla="val 70000"/>
-            </a:avLst>
-          </a:prstGeom>
-          <a:solidFill>
-            <a:srgbClr val="009845"/>
-          </a:solidFill>
-          <a:ln/>
-        </p:spPr>
-      </p:sp>
-      <p:pic>
-        <p:nvPicPr>
-          <p:cNvPr id="53" name="Image 9" descr="deploy/assets/icons/qlik-app.png">    </p:cNvPr>
-          <p:cNvPicPr>
-            <a:picLocks noChangeAspect="1"/>
-          </p:cNvPicPr>
-          <p:nvPr/>
-        </p:nvPicPr>
-        <p:blipFill>
-          <a:blip r:embed="rId11"/>
-          <a:stretch>
-            <a:fillRect/>
-          </a:stretch>
-        </p:blipFill>
-        <p:spPr>
-          <a:xfrm>
-            <a:off x="8906256" y="4219956"/>
-            <a:ext cx="566928" cy="566928"/>
-          </a:xfrm>
-          <a:prstGeom prst="rect">
-            <a:avLst/>
-          </a:prstGeom>
-        </p:spPr>
-      </p:pic>
-      <p:sp>
-        <p:nvSpPr>
-          <p:cNvPr id="54" name="Text 42"/>
-          <p:cNvSpPr/>
-          <p:nvPr/>
-        </p:nvSpPr>
-        <p:spPr>
-          <a:xfrm>
-            <a:off x="9601200" y="4178808"/>
-            <a:ext cx="1874520" cy="310896"/>
+            <a:off x="9601200" y="4087368"/>
+            <a:ext cx="1874520" cy="292608"/>
           </a:xfrm>
           <a:prstGeom prst="rect">
             <a:avLst/>
@@ -17025,13 +16995,13 @@
       </p:sp>
       <p:sp>
         <p:nvSpPr>
-          <p:cNvPr id="55" name="Text 43"/>
+          <p:cNvPr id="54" name="Text 43"/>
           <p:cNvSpPr/>
           <p:nvPr/>
         </p:nvSpPr>
         <p:spPr>
           <a:xfrm>
-            <a:off x="9601200" y="4471416"/>
+            <a:off x="9601200" y="4379976"/>
             <a:ext cx="1874520" cy="393192"/>
           </a:xfrm>
           <a:prstGeom prst="rect">
@@ -17050,7 +17020,7 @@
             <a:r>
               <a:rPr lang="en-US" sz="900" dirty="0">
                 <a:solidFill>
-                  <a:srgbClr val="A9B3B6"/>
+                  <a:srgbClr val="545659"/>
                 </a:solidFill>
                 <a:latin typeface="Inter" pitchFamily="34" charset="0"/>
                 <a:ea typeface="Inter" pitchFamily="34" charset="-122"/>
@@ -17064,13 +17034,13 @@
       </p:sp>
       <p:sp>
         <p:nvSpPr>
-          <p:cNvPr id="56" name="Shape 44"/>
+          <p:cNvPr id="55" name="Shape 44"/>
           <p:cNvSpPr/>
           <p:nvPr/>
         </p:nvSpPr>
         <p:spPr>
           <a:xfrm>
-            <a:off x="3703320" y="2217420"/>
+            <a:off x="3703320" y="2125980"/>
             <a:ext cx="548640" cy="0"/>
           </a:xfrm>
           <a:prstGeom prst="line">
@@ -17088,13 +17058,13 @@
       </p:sp>
       <p:sp>
         <p:nvSpPr>
-          <p:cNvPr id="57" name="Shape 45"/>
+          <p:cNvPr id="56" name="Shape 45"/>
           <p:cNvSpPr/>
           <p:nvPr/>
         </p:nvSpPr>
         <p:spPr>
           <a:xfrm>
-            <a:off x="3703320" y="3360420"/>
+            <a:off x="3703320" y="3268980"/>
             <a:ext cx="548640" cy="1143000"/>
           </a:xfrm>
           <a:prstGeom prst="line">
@@ -17112,13 +17082,13 @@
       </p:sp>
       <p:sp>
         <p:nvSpPr>
-          <p:cNvPr id="58" name="Shape 46"/>
+          <p:cNvPr id="57" name="Shape 46"/>
           <p:cNvSpPr/>
           <p:nvPr/>
         </p:nvSpPr>
         <p:spPr>
           <a:xfrm>
-            <a:off x="3703320" y="4503420"/>
+            <a:off x="3703320" y="4411980"/>
             <a:ext cx="548640" cy="0"/>
           </a:xfrm>
           <a:prstGeom prst="line">
@@ -17136,13 +17106,13 @@
       </p:sp>
       <p:sp>
         <p:nvSpPr>
-          <p:cNvPr id="59" name="Shape 47"/>
+          <p:cNvPr id="58" name="Shape 47"/>
           <p:cNvSpPr/>
           <p:nvPr/>
         </p:nvSpPr>
         <p:spPr>
           <a:xfrm>
-            <a:off x="8138160" y="2217420"/>
+            <a:off x="8138160" y="2125980"/>
             <a:ext cx="548640" cy="0"/>
           </a:xfrm>
           <a:prstGeom prst="line">
@@ -17160,13 +17130,13 @@
       </p:sp>
       <p:sp>
         <p:nvSpPr>
-          <p:cNvPr id="60" name="Shape 48"/>
+          <p:cNvPr id="59" name="Shape 48"/>
           <p:cNvSpPr/>
           <p:nvPr/>
         </p:nvSpPr>
         <p:spPr>
           <a:xfrm>
-            <a:off x="8138160" y="3360420"/>
+            <a:off x="8138160" y="3268980"/>
             <a:ext cx="548640" cy="-1143000"/>
           </a:xfrm>
           <a:prstGeom prst="line">
@@ -17184,13 +17154,13 @@
       </p:sp>
       <p:sp>
         <p:nvSpPr>
-          <p:cNvPr id="61" name="Shape 49"/>
+          <p:cNvPr id="60" name="Shape 49"/>
           <p:cNvSpPr/>
           <p:nvPr/>
         </p:nvSpPr>
         <p:spPr>
           <a:xfrm>
-            <a:off x="8138160" y="4503420"/>
+            <a:off x="8138160" y="4411980"/>
             <a:ext cx="548640" cy="-2286000"/>
           </a:xfrm>
           <a:prstGeom prst="line">
@@ -17208,38 +17178,434 @@
       </p:sp>
       <p:sp>
         <p:nvSpPr>
-          <p:cNvPr id="62" name="Shape 50"/>
+          <p:cNvPr id="61" name="Text 50"/>
           <p:cNvSpPr/>
           <p:nvPr/>
         </p:nvSpPr>
         <p:spPr>
           <a:xfrm>
-            <a:off x="10122408" y="2628900"/>
-            <a:ext cx="0" cy="731520"/>
-          </a:xfrm>
-          <a:prstGeom prst="line">
+            <a:off x="457200" y="5321808"/>
+            <a:ext cx="11247120" cy="256032"/>
+          </a:xfrm>
+          <a:prstGeom prst="rect">
             <a:avLst/>
           </a:prstGeom>
           <a:noFill/>
-          <a:ln w="22225">
+          <a:ln/>
+        </p:spPr>
+        <p:txBody>
+          <a:bodyPr wrap="square" rtlCol="0" anchor="ctr"/>
+          <a:lstStyle/>
+          <a:p>
+            <a:pPr indent="0" marL="0">
+              <a:buNone/>
+            </a:pPr>
+            <a:r>
+              <a:rPr lang="en-US" sz="1100" b="1" spc="100" kern="0" dirty="0">
+                <a:solidFill>
+                  <a:srgbClr val="009845"/>
+                </a:solidFill>
+                <a:latin typeface="Inter" pitchFamily="34" charset="0"/>
+                <a:ea typeface="Inter" pitchFamily="34" charset="-122"/>
+                <a:cs typeface="Inter" pitchFamily="34" charset="-120"/>
+              </a:rPr>
+              <a:t>TELEMETRY EXPORT · OPENTELEMETRY COLLECTOR</a:t>
+            </a:r>
+            <a:endParaRPr lang="en-US" sz="1100" dirty="0"/>
+          </a:p>
+        </p:txBody>
+      </p:sp>
+      <p:sp>
+        <p:nvSpPr>
+          <p:cNvPr id="62" name="Shape 51"/>
+          <p:cNvSpPr/>
+          <p:nvPr/>
+        </p:nvSpPr>
+        <p:spPr>
+          <a:xfrm>
+            <a:off x="594360" y="5623560"/>
+            <a:ext cx="3840480" cy="841248"/>
+          </a:xfrm>
+          <a:prstGeom prst="roundRect">
+            <a:avLst>
+              <a:gd name="adj" fmla="val 7609"/>
+            </a:avLst>
+          </a:prstGeom>
+          <a:solidFill>
+            <a:srgbClr val="FFFFFF"/>
+          </a:solidFill>
+          <a:ln w="15875">
+            <a:solidFill>
+              <a:srgbClr val="006580"/>
+            </a:solidFill>
+            <a:prstDash val="solid"/>
+          </a:ln>
+        </p:spPr>
+      </p:sp>
+      <p:sp>
+        <p:nvSpPr>
+          <p:cNvPr id="63" name="Shape 52"/>
+          <p:cNvSpPr/>
+          <p:nvPr/>
+        </p:nvSpPr>
+        <p:spPr>
+          <a:xfrm>
+            <a:off x="594360" y="5623560"/>
+            <a:ext cx="91440" cy="841248"/>
+          </a:xfrm>
+          <a:prstGeom prst="roundRect">
+            <a:avLst>
+              <a:gd name="adj" fmla="val 70000"/>
+            </a:avLst>
+          </a:prstGeom>
+          <a:solidFill>
+            <a:srgbClr val="006580"/>
+          </a:solidFill>
+          <a:ln/>
+        </p:spPr>
+      </p:sp>
+      <p:sp>
+        <p:nvSpPr>
+          <p:cNvPr id="64" name="Text 53"/>
+          <p:cNvSpPr/>
+          <p:nvPr/>
+        </p:nvSpPr>
+        <p:spPr>
+          <a:xfrm>
+            <a:off x="850392" y="5733288"/>
+            <a:ext cx="3493008" cy="292608"/>
+          </a:xfrm>
+          <a:prstGeom prst="rect">
+            <a:avLst/>
+          </a:prstGeom>
+          <a:noFill/>
+          <a:ln/>
+        </p:spPr>
+        <p:txBody>
+          <a:bodyPr wrap="square" rtlCol="0" anchor="ctr"/>
+          <a:lstStyle/>
+          <a:p>
+            <a:pPr indent="0" marL="0">
+              <a:buNone/>
+            </a:pPr>
+            <a:r>
+              <a:rPr lang="en-US" sz="1200" b="1" dirty="0">
+                <a:solidFill>
+                  <a:srgbClr val="2D3543"/>
+                </a:solidFill>
+                <a:latin typeface="Inter" pitchFamily="34" charset="0"/>
+                <a:ea typeface="Inter" pitchFamily="34" charset="-122"/>
+                <a:cs typeface="Inter" pitchFamily="34" charset="-120"/>
+              </a:rPr>
+              <a:t>OpenTelemetry Collector</a:t>
+            </a:r>
+            <a:endParaRPr lang="en-US" sz="1200" dirty="0"/>
+          </a:p>
+        </p:txBody>
+      </p:sp>
+      <p:sp>
+        <p:nvSpPr>
+          <p:cNvPr id="65" name="Text 54"/>
+          <p:cNvSpPr/>
+          <p:nvPr/>
+        </p:nvSpPr>
+        <p:spPr>
+          <a:xfrm>
+            <a:off x="850392" y="6025896"/>
+            <a:ext cx="3493008" cy="365760"/>
+          </a:xfrm>
+          <a:prstGeom prst="rect">
+            <a:avLst/>
+          </a:prstGeom>
+          <a:noFill/>
+          <a:ln/>
+        </p:spPr>
+        <p:txBody>
+          <a:bodyPr wrap="square" rtlCol="0" anchor="t"/>
+          <a:lstStyle/>
+          <a:p>
+            <a:pPr indent="0" marL="0">
+              <a:buNone/>
+            </a:pPr>
+            <a:r>
+              <a:rPr lang="en-US" sz="900" dirty="0">
+                <a:solidFill>
+                  <a:srgbClr val="545659"/>
+                </a:solidFill>
+                <a:latin typeface="Inter" pitchFamily="34" charset="0"/>
+                <a:ea typeface="Inter" pitchFamily="34" charset="-122"/>
+                <a:cs typeface="Inter" pitchFamily="34" charset="-120"/>
+              </a:rPr>
+              <a:t>OTLP receiver · scrapes every /metrics · batch + route</a:t>
+            </a:r>
+            <a:endParaRPr lang="en-US" sz="900" dirty="0"/>
+          </a:p>
+        </p:txBody>
+      </p:sp>
+      <p:sp>
+        <p:nvSpPr>
+          <p:cNvPr id="66" name="Shape 55"/>
+          <p:cNvSpPr/>
+          <p:nvPr/>
+        </p:nvSpPr>
+        <p:spPr>
+          <a:xfrm>
+            <a:off x="4937760" y="5623560"/>
+            <a:ext cx="3200400" cy="841248"/>
+          </a:xfrm>
+          <a:prstGeom prst="roundRect">
+            <a:avLst>
+              <a:gd name="adj" fmla="val 7609"/>
+            </a:avLst>
+          </a:prstGeom>
+          <a:solidFill>
+            <a:srgbClr val="FFFFFF"/>
+          </a:solidFill>
+          <a:ln w="15875">
+            <a:solidFill>
+              <a:srgbClr val="93579C"/>
+            </a:solidFill>
+            <a:prstDash val="solid"/>
+          </a:ln>
+        </p:spPr>
+      </p:sp>
+      <p:sp>
+        <p:nvSpPr>
+          <p:cNvPr id="67" name="Shape 56"/>
+          <p:cNvSpPr/>
+          <p:nvPr/>
+        </p:nvSpPr>
+        <p:spPr>
+          <a:xfrm>
+            <a:off x="4937760" y="5623560"/>
+            <a:ext cx="91440" cy="841248"/>
+          </a:xfrm>
+          <a:prstGeom prst="roundRect">
+            <a:avLst>
+              <a:gd name="adj" fmla="val 70000"/>
+            </a:avLst>
+          </a:prstGeom>
+          <a:solidFill>
+            <a:srgbClr val="93579C"/>
+          </a:solidFill>
+          <a:ln/>
+        </p:spPr>
+      </p:sp>
+      <p:sp>
+        <p:nvSpPr>
+          <p:cNvPr id="68" name="Text 57"/>
+          <p:cNvSpPr/>
+          <p:nvPr/>
+        </p:nvSpPr>
+        <p:spPr>
+          <a:xfrm>
+            <a:off x="5193792" y="5733288"/>
+            <a:ext cx="2852928" cy="292608"/>
+          </a:xfrm>
+          <a:prstGeom prst="rect">
+            <a:avLst/>
+          </a:prstGeom>
+          <a:noFill/>
+          <a:ln/>
+        </p:spPr>
+        <p:txBody>
+          <a:bodyPr wrap="square" rtlCol="0" anchor="ctr"/>
+          <a:lstStyle/>
+          <a:p>
+            <a:pPr indent="0" marL="0">
+              <a:buNone/>
+            </a:pPr>
+            <a:r>
+              <a:rPr lang="en-US" sz="1200" b="1" dirty="0">
+                <a:solidFill>
+                  <a:srgbClr val="2D3543"/>
+                </a:solidFill>
+                <a:latin typeface="Inter" pitchFamily="34" charset="0"/>
+                <a:ea typeface="Inter" pitchFamily="34" charset="-122"/>
+                <a:cs typeface="Inter" pitchFamily="34" charset="-120"/>
+              </a:rPr>
+              <a:t>Datadog</a:t>
+            </a:r>
+            <a:endParaRPr lang="en-US" sz="1200" dirty="0"/>
+          </a:p>
+        </p:txBody>
+      </p:sp>
+      <p:sp>
+        <p:nvSpPr>
+          <p:cNvPr id="69" name="Text 58"/>
+          <p:cNvSpPr/>
+          <p:nvPr/>
+        </p:nvSpPr>
+        <p:spPr>
+          <a:xfrm>
+            <a:off x="5193792" y="6025896"/>
+            <a:ext cx="2852928" cy="365760"/>
+          </a:xfrm>
+          <a:prstGeom prst="rect">
+            <a:avLst/>
+          </a:prstGeom>
+          <a:noFill/>
+          <a:ln/>
+        </p:spPr>
+        <p:txBody>
+          <a:bodyPr wrap="square" rtlCol="0" anchor="t"/>
+          <a:lstStyle/>
+          <a:p>
+            <a:pPr indent="0" marL="0">
+              <a:buNone/>
+            </a:pPr>
+            <a:r>
+              <a:rPr lang="en-US" sz="900" dirty="0">
+                <a:solidFill>
+                  <a:srgbClr val="545659"/>
+                </a:solidFill>
+                <a:latin typeface="Inter" pitchFamily="34" charset="0"/>
+                <a:ea typeface="Inter" pitchFamily="34" charset="-122"/>
+                <a:cs typeface="Inter" pitchFamily="34" charset="-120"/>
+              </a:rPr>
+              <a:t>metrics · logs · APM  (datadog exporter)</a:t>
+            </a:r>
+            <a:endParaRPr lang="en-US" sz="900" dirty="0"/>
+          </a:p>
+        </p:txBody>
+      </p:sp>
+      <p:sp>
+        <p:nvSpPr>
+          <p:cNvPr id="70" name="Shape 59"/>
+          <p:cNvSpPr/>
+          <p:nvPr/>
+        </p:nvSpPr>
+        <p:spPr>
+          <a:xfrm>
+            <a:off x="8321040" y="5623560"/>
+            <a:ext cx="3246120" cy="841248"/>
+          </a:xfrm>
+          <a:prstGeom prst="roundRect">
+            <a:avLst>
+              <a:gd name="adj" fmla="val 7609"/>
+            </a:avLst>
+          </a:prstGeom>
+          <a:solidFill>
+            <a:srgbClr val="FFFFFF"/>
+          </a:solidFill>
+          <a:ln w="15875">
             <a:solidFill>
               <a:srgbClr val="19416C"/>
             </a:solidFill>
             <a:prstDash val="solid"/>
-            <a:tailEnd type="triangle"/>
           </a:ln>
         </p:spPr>
       </p:sp>
       <p:sp>
         <p:nvSpPr>
-          <p:cNvPr id="63" name="Shape 51"/>
+          <p:cNvPr id="71" name="Shape 60"/>
           <p:cNvSpPr/>
           <p:nvPr/>
         </p:nvSpPr>
         <p:spPr>
           <a:xfrm>
-            <a:off x="10122408" y="3771900"/>
-            <a:ext cx="0" cy="731520"/>
+            <a:off x="8321040" y="5623560"/>
+            <a:ext cx="91440" cy="841248"/>
+          </a:xfrm>
+          <a:prstGeom prst="roundRect">
+            <a:avLst>
+              <a:gd name="adj" fmla="val 70000"/>
+            </a:avLst>
+          </a:prstGeom>
+          <a:solidFill>
+            <a:srgbClr val="19416C"/>
+          </a:solidFill>
+          <a:ln/>
+        </p:spPr>
+      </p:sp>
+      <p:sp>
+        <p:nvSpPr>
+          <p:cNvPr id="72" name="Text 61"/>
+          <p:cNvSpPr/>
+          <p:nvPr/>
+        </p:nvSpPr>
+        <p:spPr>
+          <a:xfrm>
+            <a:off x="8577072" y="5733288"/>
+            <a:ext cx="2898648" cy="292608"/>
+          </a:xfrm>
+          <a:prstGeom prst="rect">
+            <a:avLst/>
+          </a:prstGeom>
+          <a:noFill/>
+          <a:ln/>
+        </p:spPr>
+        <p:txBody>
+          <a:bodyPr wrap="square" rtlCol="0" anchor="ctr"/>
+          <a:lstStyle/>
+          <a:p>
+            <a:pPr indent="0" marL="0">
+              <a:buNone/>
+            </a:pPr>
+            <a:r>
+              <a:rPr lang="en-US" sz="1200" b="1" dirty="0">
+                <a:solidFill>
+                  <a:srgbClr val="2D3543"/>
+                </a:solidFill>
+                <a:latin typeface="Inter" pitchFamily="34" charset="0"/>
+                <a:ea typeface="Inter" pitchFamily="34" charset="-122"/>
+                <a:cs typeface="Inter" pitchFamily="34" charset="-120"/>
+              </a:rPr>
+              <a:t>Splunk</a:t>
+            </a:r>
+            <a:endParaRPr lang="en-US" sz="1200" dirty="0"/>
+          </a:p>
+        </p:txBody>
+      </p:sp>
+      <p:sp>
+        <p:nvSpPr>
+          <p:cNvPr id="73" name="Text 62"/>
+          <p:cNvSpPr/>
+          <p:nvPr/>
+        </p:nvSpPr>
+        <p:spPr>
+          <a:xfrm>
+            <a:off x="8577072" y="6025896"/>
+            <a:ext cx="2898648" cy="365760"/>
+          </a:xfrm>
+          <a:prstGeom prst="rect">
+            <a:avLst/>
+          </a:prstGeom>
+          <a:noFill/>
+          <a:ln/>
+        </p:spPr>
+        <p:txBody>
+          <a:bodyPr wrap="square" rtlCol="0" anchor="t"/>
+          <a:lstStyle/>
+          <a:p>
+            <a:pPr indent="0" marL="0">
+              <a:buNone/>
+            </a:pPr>
+            <a:r>
+              <a:rPr lang="en-US" sz="900" dirty="0">
+                <a:solidFill>
+                  <a:srgbClr val="545659"/>
+                </a:solidFill>
+                <a:latin typeface="Inter" pitchFamily="34" charset="0"/>
+                <a:ea typeface="Inter" pitchFamily="34" charset="-122"/>
+                <a:cs typeface="Inter" pitchFamily="34" charset="-120"/>
+              </a:rPr>
+              <a:t>HEC / Observability Cloud  (splunk_hec)</a:t>
+            </a:r>
+            <a:endParaRPr lang="en-US" sz="900" dirty="0"/>
+          </a:p>
+        </p:txBody>
+      </p:sp>
+      <p:sp>
+        <p:nvSpPr>
+          <p:cNvPr id="74" name="Shape 63"/>
+          <p:cNvSpPr/>
+          <p:nvPr/>
+        </p:nvSpPr>
+        <p:spPr>
+          <a:xfrm>
+            <a:off x="4434840" y="6044184"/>
+            <a:ext cx="502920" cy="0"/>
           </a:xfrm>
           <a:prstGeom prst="line">
             <a:avLst/>
@@ -17247,79 +17613,40 @@
           <a:noFill/>
           <a:ln w="22225">
             <a:solidFill>
-              <a:srgbClr val="009845"/>
+              <a:srgbClr val="006580"/>
             </a:solidFill>
             <a:prstDash val="solid"/>
             <a:tailEnd type="triangle"/>
           </a:ln>
         </p:spPr>
       </p:sp>
-      <p:pic>
-        <p:nvPicPr>
-          <p:cNvPr id="64" name="Image 10" descr="deploy/assets/icons/qvd.png">    </p:cNvPr>
-          <p:cNvPicPr>
-            <a:picLocks noChangeAspect="1"/>
-          </p:cNvPicPr>
-          <p:nvPr/>
-        </p:nvPicPr>
-        <p:blipFill>
-          <a:blip r:embed="rId12"/>
-          <a:stretch>
-            <a:fillRect/>
-          </a:stretch>
-        </p:blipFill>
-        <p:spPr>
-          <a:xfrm>
-            <a:off x="457200" y="6016752"/>
-            <a:ext cx="384048" cy="384048"/>
-          </a:xfrm>
-          <a:prstGeom prst="rect">
-            <a:avLst/>
-          </a:prstGeom>
-        </p:spPr>
-      </p:pic>
-      <p:sp>
-        <p:nvSpPr>
-          <p:cNvPr id="65" name="Text 52"/>
+      <p:sp>
+        <p:nvSpPr>
+          <p:cNvPr id="75" name="Shape 64"/>
           <p:cNvSpPr/>
           <p:nvPr/>
         </p:nvSpPr>
         <p:spPr>
           <a:xfrm>
-            <a:off x="914400" y="6035040"/>
-            <a:ext cx="10789920" cy="411480"/>
-          </a:xfrm>
-          <a:prstGeom prst="rect">
+            <a:off x="8138160" y="6044184"/>
+            <a:ext cx="182880" cy="0"/>
+          </a:xfrm>
+          <a:prstGeom prst="line">
             <a:avLst/>
           </a:prstGeom>
           <a:noFill/>
-          <a:ln/>
-        </p:spPr>
-        <p:txBody>
-          <a:bodyPr wrap="square" rtlCol="0" anchor="ctr"/>
-          <a:lstStyle/>
-          <a:p>
-            <a:pPr indent="0" marL="0">
-              <a:buNone/>
-            </a:pPr>
-            <a:r>
-              <a:rPr lang="en-US" sz="1000" i="1" dirty="0">
-                <a:solidFill>
-                  <a:srgbClr val="2D3543"/>
-                </a:solidFill>
-                <a:latin typeface="Inter" pitchFamily="34" charset="0"/>
-                <a:ea typeface="Inter" pitchFamily="34" charset="-122"/>
-                <a:cs typeface="Inter" pitchFamily="34" charset="-120"/>
-              </a:rPr>
-              <a:t>QVD bridge: Prometheus PromQL → long-form (timestamp, metric, labels, value) rows → QVD via pyqvd → Qlik Cloud Data Files API → analyst sheets.</a:t>
-            </a:r>
-            <a:endParaRPr lang="en-US" sz="1000" dirty="0"/>
-          </a:p>
-        </p:txBody>
-      </p:sp>
-      <p:sp>
-        <p:nvSpPr>
-          <p:cNvPr id="66" name="Shape 53"/>
+          <a:ln w="22225">
+            <a:solidFill>
+              <a:srgbClr val="006580"/>
+            </a:solidFill>
+            <a:prstDash val="solid"/>
+            <a:tailEnd type="triangle"/>
+          </a:ln>
+        </p:spPr>
+      </p:sp>
+      <p:sp>
+        <p:nvSpPr>
+          <p:cNvPr id="76" name="Shape 65"/>
           <p:cNvSpPr/>
           <p:nvPr/>
         </p:nvSpPr>
@@ -17377,8 +17704,8 @@
         </p:nvSpPr>
         <p:spPr>
           <a:xfrm>
-            <a:off x="457200" y="228600"/>
-            <a:ext cx="11247120" cy="548640"/>
+            <a:off x="1874520" y="292608"/>
+            <a:ext cx="9509760" cy="548640"/>
           </a:xfrm>
           <a:prstGeom prst="rect">
             <a:avLst/>
@@ -17396,7 +17723,7 @@
             <a:r>
               <a:rPr lang="en-US" sz="2600" b="1" dirty="0">
                 <a:solidFill>
-                  <a:srgbClr val="006580"/>
+                  <a:srgbClr val="2D3543"/>
                 </a:solidFill>
                 <a:latin typeface="Inter" pitchFamily="34" charset="0"/>
                 <a:ea typeface="Inter" pitchFamily="34" charset="-122"/>
@@ -19029,8 +19356,8 @@
         </p:nvSpPr>
         <p:spPr>
           <a:xfrm>
-            <a:off x="457200" y="228600"/>
-            <a:ext cx="11247120" cy="548640"/>
+            <a:off x="1874520" y="292608"/>
+            <a:ext cx="9509760" cy="548640"/>
           </a:xfrm>
           <a:prstGeom prst="rect">
             <a:avLst/>
@@ -19048,7 +19375,7 @@
             <a:r>
               <a:rPr lang="en-US" sz="2400" b="1" dirty="0">
                 <a:solidFill>
-                  <a:srgbClr val="006580"/>
+                  <a:srgbClr val="2D3543"/>
                 </a:solidFill>
                 <a:latin typeface="Inter" pitchFamily="34" charset="0"/>
                 <a:ea typeface="Inter" pitchFamily="34" charset="-122"/>
@@ -20084,7 +20411,7 @@
     <p:bg>
       <p:bgPr>
         <a:solidFill>
-          <a:srgbClr val="006580"/>
+          <a:srgbClr val="F6F7F8"/>
         </a:solidFill>
       </p:bgPr>
     </p:bg>
@@ -20110,8 +20437,8 @@
         </p:nvSpPr>
         <p:spPr>
           <a:xfrm>
-            <a:off x="457200" y="365760"/>
-            <a:ext cx="11247120" cy="640080"/>
+            <a:off x="1874520" y="365760"/>
+            <a:ext cx="9509760" cy="640080"/>
           </a:xfrm>
           <a:prstGeom prst="rect">
             <a:avLst/>
@@ -20129,7 +20456,7 @@
             <a:r>
               <a:rPr lang="en-US" sz="3000" b="1" dirty="0">
                 <a:solidFill>
-                  <a:srgbClr val="FFFFFF"/>
+                  <a:srgbClr val="2D3543"/>
                 </a:solidFill>
                 <a:latin typeface="Inter" pitchFamily="34" charset="0"/>
                 <a:ea typeface="Inter" pitchFamily="34" charset="-122"/>
@@ -20149,8 +20476,8 @@
         </p:nvSpPr>
         <p:spPr>
           <a:xfrm>
-            <a:off x="457200" y="1051560"/>
-            <a:ext cx="11247120" cy="365760"/>
+            <a:off x="1874520" y="896112"/>
+            <a:ext cx="9509760" cy="365760"/>
           </a:xfrm>
           <a:prstGeom prst="rect">
             <a:avLst/>
@@ -20168,7 +20495,7 @@
             <a:r>
               <a:rPr lang="en-US" sz="1300" dirty="0">
                 <a:solidFill>
-                  <a:srgbClr val="10CFC9"/>
+                  <a:srgbClr val="545659"/>
                 </a:solidFill>
                 <a:latin typeface="Inter" pitchFamily="34" charset="0"/>
                 <a:ea typeface="Inter" pitchFamily="34" charset="-122"/>
@@ -20277,7 +20604,7 @@
             <a:r>
               <a:rPr lang="en-US" sz="1100" b="1" dirty="0">
                 <a:solidFill>
-                  <a:srgbClr val="10CFC9"/>
+                  <a:srgbClr val="009845"/>
                 </a:solidFill>
                 <a:latin typeface="Inter" pitchFamily="34" charset="0"/>
                 <a:ea typeface="Inter" pitchFamily="34" charset="-122"/>
@@ -20316,7 +20643,7 @@
             <a:r>
               <a:rPr lang="en-US" sz="1000" dirty="0">
                 <a:solidFill>
-                  <a:srgbClr val="FFFFFF"/>
+                  <a:srgbClr val="545659"/>
                 </a:solidFill>
                 <a:latin typeface="Inter" pitchFamily="34" charset="0"/>
                 <a:ea typeface="Inter" pitchFamily="34" charset="-122"/>
@@ -20355,7 +20682,7 @@
             <a:r>
               <a:rPr lang="en-US" sz="1100" b="1" dirty="0">
                 <a:solidFill>
-                  <a:srgbClr val="10CFC9"/>
+                  <a:srgbClr val="009845"/>
                 </a:solidFill>
                 <a:latin typeface="Inter" pitchFamily="34" charset="0"/>
                 <a:ea typeface="Inter" pitchFamily="34" charset="-122"/>
@@ -20394,7 +20721,7 @@
             <a:r>
               <a:rPr lang="en-US" sz="1000" dirty="0">
                 <a:solidFill>
-                  <a:srgbClr val="FFFFFF"/>
+                  <a:srgbClr val="545659"/>
                 </a:solidFill>
                 <a:latin typeface="Inter" pitchFamily="34" charset="0"/>
                 <a:ea typeface="Inter" pitchFamily="34" charset="-122"/>
@@ -20433,7 +20760,7 @@
             <a:r>
               <a:rPr lang="en-US" sz="1100" b="1" dirty="0">
                 <a:solidFill>
-                  <a:srgbClr val="10CFC9"/>
+                  <a:srgbClr val="009845"/>
                 </a:solidFill>
                 <a:latin typeface="Inter" pitchFamily="34" charset="0"/>
                 <a:ea typeface="Inter" pitchFamily="34" charset="-122"/>
@@ -20472,7 +20799,7 @@
             <a:r>
               <a:rPr lang="en-US" sz="1000" dirty="0">
                 <a:solidFill>
-                  <a:srgbClr val="FFFFFF"/>
+                  <a:srgbClr val="545659"/>
                 </a:solidFill>
                 <a:latin typeface="Inter" pitchFamily="34" charset="0"/>
                 <a:ea typeface="Inter" pitchFamily="34" charset="-122"/>
@@ -20511,7 +20838,7 @@
             <a:r>
               <a:rPr lang="en-US" sz="1100" b="1" dirty="0">
                 <a:solidFill>
-                  <a:srgbClr val="10CFC9"/>
+                  <a:srgbClr val="009845"/>
                 </a:solidFill>
                 <a:latin typeface="Inter" pitchFamily="34" charset="0"/>
                 <a:ea typeface="Inter" pitchFamily="34" charset="-122"/>
@@ -20550,7 +20877,7 @@
             <a:r>
               <a:rPr lang="en-US" sz="1000" dirty="0">
                 <a:solidFill>
-                  <a:srgbClr val="FFFFFF"/>
+                  <a:srgbClr val="545659"/>
                 </a:solidFill>
                 <a:latin typeface="Inter" pitchFamily="34" charset="0"/>
                 <a:ea typeface="Inter" pitchFamily="34" charset="-122"/>
@@ -20589,7 +20916,7 @@
             <a:r>
               <a:rPr lang="en-US" sz="1100" b="1" dirty="0">
                 <a:solidFill>
-                  <a:srgbClr val="10CFC9"/>
+                  <a:srgbClr val="009845"/>
                 </a:solidFill>
                 <a:latin typeface="Inter" pitchFamily="34" charset="0"/>
                 <a:ea typeface="Inter" pitchFamily="34" charset="-122"/>
@@ -20628,7 +20955,7 @@
             <a:r>
               <a:rPr lang="en-US" sz="1000" dirty="0">
                 <a:solidFill>
-                  <a:srgbClr val="FFFFFF"/>
+                  <a:srgbClr val="545659"/>
                 </a:solidFill>
                 <a:latin typeface="Inter" pitchFamily="34" charset="0"/>
                 <a:ea typeface="Inter" pitchFamily="34" charset="-122"/>
@@ -20667,7 +20994,7 @@
             <a:r>
               <a:rPr lang="en-US" sz="1100" b="1" dirty="0">
                 <a:solidFill>
-                  <a:srgbClr val="10CFC9"/>
+                  <a:srgbClr val="009845"/>
                 </a:solidFill>
                 <a:latin typeface="Inter" pitchFamily="34" charset="0"/>
                 <a:ea typeface="Inter" pitchFamily="34" charset="-122"/>
@@ -20706,7 +21033,7 @@
             <a:r>
               <a:rPr lang="en-US" sz="1000" dirty="0">
                 <a:solidFill>
-                  <a:srgbClr val="FFFFFF"/>
+                  <a:srgbClr val="545659"/>
                 </a:solidFill>
                 <a:latin typeface="Inter" pitchFamily="34" charset="0"/>
                 <a:ea typeface="Inter" pitchFamily="34" charset="-122"/>
@@ -20745,7 +21072,7 @@
             <a:r>
               <a:rPr lang="en-US" sz="1100" b="1" dirty="0">
                 <a:solidFill>
-                  <a:srgbClr val="10CFC9"/>
+                  <a:srgbClr val="009845"/>
                 </a:solidFill>
                 <a:latin typeface="Inter" pitchFamily="34" charset="0"/>
                 <a:ea typeface="Inter" pitchFamily="34" charset="-122"/>
@@ -20784,7 +21111,7 @@
             <a:r>
               <a:rPr lang="en-US" sz="1000" dirty="0">
                 <a:solidFill>
-                  <a:srgbClr val="FFFFFF"/>
+                  <a:srgbClr val="545659"/>
                 </a:solidFill>
                 <a:latin typeface="Inter" pitchFamily="34" charset="0"/>
                 <a:ea typeface="Inter" pitchFamily="34" charset="-122"/>
@@ -20823,7 +21150,7 @@
             <a:r>
               <a:rPr lang="en-US" sz="1100" b="1" dirty="0">
                 <a:solidFill>
-                  <a:srgbClr val="10CFC9"/>
+                  <a:srgbClr val="009845"/>
                 </a:solidFill>
                 <a:latin typeface="Inter" pitchFamily="34" charset="0"/>
                 <a:ea typeface="Inter" pitchFamily="34" charset="-122"/>
@@ -20862,7 +21189,7 @@
             <a:r>
               <a:rPr lang="en-US" sz="1000" dirty="0">
                 <a:solidFill>
-                  <a:srgbClr val="FFFFFF"/>
+                  <a:srgbClr val="545659"/>
                 </a:solidFill>
                 <a:latin typeface="Inter" pitchFamily="34" charset="0"/>
                 <a:ea typeface="Inter" pitchFamily="34" charset="-122"/>
@@ -20901,7 +21228,7 @@
             <a:r>
               <a:rPr lang="en-US" sz="1100" b="1" dirty="0">
                 <a:solidFill>
-                  <a:srgbClr val="10CFC9"/>
+                  <a:srgbClr val="009845"/>
                 </a:solidFill>
                 <a:latin typeface="Inter" pitchFamily="34" charset="0"/>
                 <a:ea typeface="Inter" pitchFamily="34" charset="-122"/>
@@ -20940,7 +21267,7 @@
             <a:r>
               <a:rPr lang="en-US" sz="1000" dirty="0">
                 <a:solidFill>
-                  <a:srgbClr val="FFFFFF"/>
+                  <a:srgbClr val="545659"/>
                 </a:solidFill>
                 <a:latin typeface="Inter" pitchFamily="34" charset="0"/>
                 <a:ea typeface="Inter" pitchFamily="34" charset="-122"/>
@@ -20979,7 +21306,7 @@
             <a:r>
               <a:rPr lang="en-US" sz="1100" b="1" dirty="0">
                 <a:solidFill>
-                  <a:srgbClr val="10CFC9"/>
+                  <a:srgbClr val="009845"/>
                 </a:solidFill>
                 <a:latin typeface="Inter" pitchFamily="34" charset="0"/>
                 <a:ea typeface="Inter" pitchFamily="34" charset="-122"/>
@@ -21018,7 +21345,7 @@
             <a:r>
               <a:rPr lang="en-US" sz="1000" dirty="0">
                 <a:solidFill>
-                  <a:srgbClr val="FFFFFF"/>
+                  <a:srgbClr val="545659"/>
                 </a:solidFill>
                 <a:latin typeface="Inter" pitchFamily="34" charset="0"/>
                 <a:ea typeface="Inter" pitchFamily="34" charset="-122"/>
@@ -21057,7 +21384,7 @@
             <a:r>
               <a:rPr lang="en-US" sz="1100" b="1" dirty="0">
                 <a:solidFill>
-                  <a:srgbClr val="10CFC9"/>
+                  <a:srgbClr val="009845"/>
                 </a:solidFill>
                 <a:latin typeface="Inter" pitchFamily="34" charset="0"/>
                 <a:ea typeface="Inter" pitchFamily="34" charset="-122"/>
@@ -21096,7 +21423,7 @@
             <a:r>
               <a:rPr lang="en-US" sz="1000" dirty="0">
                 <a:solidFill>
-                  <a:srgbClr val="FFFFFF"/>
+                  <a:srgbClr val="545659"/>
                 </a:solidFill>
                 <a:latin typeface="Inter" pitchFamily="34" charset="0"/>
                 <a:ea typeface="Inter" pitchFamily="34" charset="-122"/>
@@ -21135,7 +21462,7 @@
             <a:r>
               <a:rPr lang="en-US" sz="1100" b="1" dirty="0">
                 <a:solidFill>
-                  <a:srgbClr val="10CFC9"/>
+                  <a:srgbClr val="009845"/>
                 </a:solidFill>
                 <a:latin typeface="Inter" pitchFamily="34" charset="0"/>
                 <a:ea typeface="Inter" pitchFamily="34" charset="-122"/>
@@ -21174,7 +21501,7 @@
             <a:r>
               <a:rPr lang="en-US" sz="1000" dirty="0">
                 <a:solidFill>
-                  <a:srgbClr val="FFFFFF"/>
+                  <a:srgbClr val="545659"/>
                 </a:solidFill>
                 <a:latin typeface="Inter" pitchFamily="34" charset="0"/>
                 <a:ea typeface="Inter" pitchFamily="34" charset="-122"/>

--- a/Qlik-Observability-Toolkit-Architecture-Qlik.pptx
+++ b/Qlik-Observability-Toolkit-Architecture-Qlik.pptx
@@ -14879,7 +14879,7 @@
                 <a:ea typeface="Inter" pitchFamily="34" charset="-122"/>
                 <a:cs typeface="Inter" pitchFamily="34" charset="-120"/>
               </a:rPr>
-              <a:t>MCP server · Prometheus · Loki · Grafana · Python exporters · OpenTelemetry · Qlik Sense</a:t>
+              <a:t>MCP server · Prometheus · Loki · Grafana · Python exporters · OpenTelemetry · Qlik Cloud Analytics</a:t>
             </a:r>
             <a:endParaRPr lang="en-US" sz="1600" dirty="0"/>
           </a:p>
@@ -16987,7 +16987,7 @@
                 <a:ea typeface="Inter" pitchFamily="34" charset="-122"/>
                 <a:cs typeface="Inter" pitchFamily="34" charset="-120"/>
               </a:rPr>
-              <a:t>Qlik Sense Cloud app</a:t>
+              <a:t>Qlik Cloud Analytics app</a:t>
             </a:r>
             <a:endParaRPr lang="en-US" sz="1200" dirty="0"/>
           </a:p>
